--- a/public/lessons/year-6-maths/spring/week-16/convert-percentages-to-fractions/teaching-powerpoint-v1.pptx
+++ b/public/lessons/year-6-maths/spring/week-16/convert-percentages-to-fractions/teaching-powerpoint-v1.pptx
@@ -2,24 +2,24 @@
 <file path=ppt/presentation.xml><?xml version="1.0" encoding="utf-8"?>
 <p:presentation xmlns:p="http://schemas.openxmlformats.org/presentationml/2006/main">
   <p:sldMasterIdLst>
-    <p:sldMasterId xmlns:r="http://schemas.openxmlformats.org/officeDocument/2006/relationships" id="2147483648" r:id="R618374324eb94eca"/>
+    <p:sldMasterId xmlns:r="http://schemas.openxmlformats.org/officeDocument/2006/relationships" id="2147483648" r:id="R2bda2fa87d27450b"/>
   </p:sldMasterIdLst>
   <p:notesMasterIdLst>
-    <p:notesMasterId xmlns:r="http://schemas.openxmlformats.org/officeDocument/2006/relationships" r:id="R073da240fcfd4eab"/>
+    <p:notesMasterId xmlns:r="http://schemas.openxmlformats.org/officeDocument/2006/relationships" r:id="Reee18a3e410945af"/>
   </p:notesMasterIdLst>
   <p:sldIdLst>
-    <p:sldId xmlns:r="http://schemas.openxmlformats.org/officeDocument/2006/relationships" id="256" r:id="R0ae6302460bb42be"/>
-    <p:sldId xmlns:r="http://schemas.openxmlformats.org/officeDocument/2006/relationships" id="257" r:id="R78d56ba8a82f4ee5"/>
-    <p:sldId xmlns:r="http://schemas.openxmlformats.org/officeDocument/2006/relationships" id="258" r:id="R2e6b1e05b5b84a23"/>
-    <p:sldId xmlns:r="http://schemas.openxmlformats.org/officeDocument/2006/relationships" id="259" r:id="R06cb028b94064c5b"/>
-    <p:sldId xmlns:r="http://schemas.openxmlformats.org/officeDocument/2006/relationships" id="260" r:id="R74fc7d4aa6084b4b"/>
-    <p:sldId xmlns:r="http://schemas.openxmlformats.org/officeDocument/2006/relationships" id="261" r:id="R35fa7b4fc380442d"/>
-    <p:sldId xmlns:r="http://schemas.openxmlformats.org/officeDocument/2006/relationships" id="262" r:id="R9ee9ef067a7542f8"/>
-    <p:sldId xmlns:r="http://schemas.openxmlformats.org/officeDocument/2006/relationships" id="263" r:id="R75fa7a43ad8f4fe4"/>
-    <p:sldId xmlns:r="http://schemas.openxmlformats.org/officeDocument/2006/relationships" id="264" r:id="R2d2edf2ec14b4fc2"/>
-    <p:sldId xmlns:r="http://schemas.openxmlformats.org/officeDocument/2006/relationships" id="265" r:id="Rb84b4904be994f3a"/>
-    <p:sldId xmlns:r="http://schemas.openxmlformats.org/officeDocument/2006/relationships" id="266" r:id="Re0ad5559acbd4618"/>
-    <p:sldId xmlns:r="http://schemas.openxmlformats.org/officeDocument/2006/relationships" id="267" r:id="Re068903ee1c941eb"/>
+    <p:sldId xmlns:r="http://schemas.openxmlformats.org/officeDocument/2006/relationships" id="256" r:id="R94c1a28d867546f7"/>
+    <p:sldId xmlns:r="http://schemas.openxmlformats.org/officeDocument/2006/relationships" id="257" r:id="R44201a4e307d4f2c"/>
+    <p:sldId xmlns:r="http://schemas.openxmlformats.org/officeDocument/2006/relationships" id="258" r:id="Rb1bda7a20b144b44"/>
+    <p:sldId xmlns:r="http://schemas.openxmlformats.org/officeDocument/2006/relationships" id="259" r:id="R4d68824a359749ef"/>
+    <p:sldId xmlns:r="http://schemas.openxmlformats.org/officeDocument/2006/relationships" id="260" r:id="Rc364b6ed74424399"/>
+    <p:sldId xmlns:r="http://schemas.openxmlformats.org/officeDocument/2006/relationships" id="261" r:id="R633981236da041b3"/>
+    <p:sldId xmlns:r="http://schemas.openxmlformats.org/officeDocument/2006/relationships" id="262" r:id="Rb2130eea1dc74cf8"/>
+    <p:sldId xmlns:r="http://schemas.openxmlformats.org/officeDocument/2006/relationships" id="263" r:id="R816beec14ef54d76"/>
+    <p:sldId xmlns:r="http://schemas.openxmlformats.org/officeDocument/2006/relationships" id="264" r:id="Rf3f2b9b6bfb04e4c"/>
+    <p:sldId xmlns:r="http://schemas.openxmlformats.org/officeDocument/2006/relationships" id="265" r:id="R0e5be36afbfc4a3f"/>
+    <p:sldId xmlns:r="http://schemas.openxmlformats.org/officeDocument/2006/relationships" id="266" r:id="R4e113797d9e0448b"/>
+    <p:sldId xmlns:r="http://schemas.openxmlformats.org/officeDocument/2006/relationships" id="267" r:id="Rf29dec717fce473c"/>
   </p:sldIdLst>
   <p:sldSz cx="12192000" cy="6858000"/>
   <p:notesSz cx="6858000" cy="9144000"/>
@@ -873,7 +873,7 @@
           <a:lstStyle xmlns:a="http://schemas.openxmlformats.org/drawingml/2006/main"/>
           <a:p xmlns:a="http://schemas.openxmlformats.org/drawingml/2006/main">
             <a:r>
-              <a:t>I do. Reveal the question, setup and each calculation stage one click at a time. Pupils watch before copying. Model answer: 7/20.</a:t>
+              <a:t>I do. Reveal the question, then reveal each mathematical change one click at a time. Point to the numbers and operation that changed before moving to the next line. Final answer: 7/20.</a:t>
             </a:r>
           </a:p>
         </p:txBody>
@@ -1291,7 +1291,7 @@
   </p:cSld>
   <p:clrMap bg1="lt1" tx1="dk1" bg2="lt2" tx2="dk2" accent1="accent1" accent2="accent2" accent3="accent3" accent4="accent4" accent5="accent5" accent6="accent6" hlink="hlink" folHlink="folHlink"/>
   <p:sldLayoutIdLst>
-    <p:sldLayoutId xmlns:r="http://schemas.openxmlformats.org/officeDocument/2006/relationships" id="2147483649" r:id="R879605e6b30741ef"/>
+    <p:sldLayoutId xmlns:r="http://schemas.openxmlformats.org/officeDocument/2006/relationships" id="2147483649" r:id="R2dbc8df3d8f24d1a"/>
   </p:sldLayoutIdLst>
   <p:txStyles>
     <p:titleStyle>
@@ -1842,7 +1842,7 @@
           <p:cNvPr id="12" name="">
             <a:extLst xmlns:a="http://schemas.openxmlformats.org/drawingml/2006/main">
               <a:ext uri="{FF2B5EF4-FFF2-40B4-BE49-F238E27FC236}">
-                <a16:creationId xmlns:a16="http://schemas.microsoft.com/office/drawing/2014/main" id="{ADE5F906-2D5F-422D-843E-A28E55BA7629}"/>
+                <a16:creationId xmlns:a16="http://schemas.microsoft.com/office/drawing/2014/main" id="{7447EA93-A028-460A-88A6-E6054581F656}"/>
               </a:ext>
             </a:extLst>
           </p:cNvPr>
@@ -1874,7 +1874,7 @@
           <p:cNvPr id="2" name="">
             <a:extLst xmlns:a="http://schemas.openxmlformats.org/drawingml/2006/main">
               <a:ext uri="{FF2B5EF4-FFF2-40B4-BE49-F238E27FC236}">
-                <a16:creationId xmlns:a16="http://schemas.microsoft.com/office/drawing/2014/main" id="{5D988864-06D7-4382-A131-6280461E55AA}"/>
+                <a16:creationId xmlns:a16="http://schemas.microsoft.com/office/drawing/2014/main" id="{18202858-7CC8-43E9-9ABA-3DC22708A60C}"/>
               </a:ext>
             </a:extLst>
           </p:cNvPr>
@@ -1931,7 +1931,7 @@
           <p:cNvPr id="3" name="">
             <a:extLst xmlns:a="http://schemas.openxmlformats.org/drawingml/2006/main">
               <a:ext uri="{FF2B5EF4-FFF2-40B4-BE49-F238E27FC236}">
-                <a16:creationId xmlns:a16="http://schemas.microsoft.com/office/drawing/2014/main" id="{7C1A333A-61DD-41B1-86F5-A7B24375E28C}"/>
+                <a16:creationId xmlns:a16="http://schemas.microsoft.com/office/drawing/2014/main" id="{22986E41-FEF1-41B9-91A7-81C217C28231}"/>
               </a:ext>
             </a:extLst>
           </p:cNvPr>
@@ -1965,7 +1965,7 @@
           <p:cNvPr id="4" name="">
             <a:extLst xmlns:a="http://schemas.openxmlformats.org/drawingml/2006/main">
               <a:ext uri="{FF2B5EF4-FFF2-40B4-BE49-F238E27FC236}">
-                <a16:creationId xmlns:a16="http://schemas.microsoft.com/office/drawing/2014/main" id="{5D6B35A0-B2BD-40D4-BDA9-6FDA53B26A30}"/>
+                <a16:creationId xmlns:a16="http://schemas.microsoft.com/office/drawing/2014/main" id="{63AED867-EF5D-4D70-BB53-FA5878696D5C}"/>
               </a:ext>
             </a:extLst>
           </p:cNvPr>
@@ -2022,7 +2022,7 @@
           <p:cNvPr id="5" name="">
             <a:extLst xmlns:a="http://schemas.openxmlformats.org/drawingml/2006/main">
               <a:ext uri="{FF2B5EF4-FFF2-40B4-BE49-F238E27FC236}">
-                <a16:creationId xmlns:a16="http://schemas.microsoft.com/office/drawing/2014/main" id="{C6101043-92B8-4C5D-AF2A-901FA92E8737}"/>
+                <a16:creationId xmlns:a16="http://schemas.microsoft.com/office/drawing/2014/main" id="{022828EF-7072-45AB-8B03-DE2E9E4276EB}"/>
               </a:ext>
             </a:extLst>
           </p:cNvPr>
@@ -2079,7 +2079,7 @@
           <p:cNvPr id="6" name="">
             <a:extLst xmlns:a="http://schemas.openxmlformats.org/drawingml/2006/main">
               <a:ext uri="{FF2B5EF4-FFF2-40B4-BE49-F238E27FC236}">
-                <a16:creationId xmlns:a16="http://schemas.microsoft.com/office/drawing/2014/main" id="{0166CEF7-48D3-4F9C-8412-8427C2BAE98E}"/>
+                <a16:creationId xmlns:a16="http://schemas.microsoft.com/office/drawing/2014/main" id="{C6D6E0DB-1CD2-40B3-8FFB-AC1ACA5CA5EC}"/>
               </a:ext>
             </a:extLst>
           </p:cNvPr>
@@ -2113,7 +2113,7 @@
           <p:cNvPr id="7" name="">
             <a:extLst xmlns:a="http://schemas.openxmlformats.org/drawingml/2006/main">
               <a:ext uri="{FF2B5EF4-FFF2-40B4-BE49-F238E27FC236}">
-                <a16:creationId xmlns:a16="http://schemas.microsoft.com/office/drawing/2014/main" id="{3472D1D7-669C-472A-9FE4-9701955DFC85}"/>
+                <a16:creationId xmlns:a16="http://schemas.microsoft.com/office/drawing/2014/main" id="{CD523B5A-89FE-40F2-B1E0-062F73A5CD10}"/>
               </a:ext>
             </a:extLst>
           </p:cNvPr>
@@ -2170,7 +2170,7 @@
           <p:cNvPr id="8" name="">
             <a:extLst xmlns:a="http://schemas.openxmlformats.org/drawingml/2006/main">
               <a:ext uri="{FF2B5EF4-FFF2-40B4-BE49-F238E27FC236}">
-                <a16:creationId xmlns:a16="http://schemas.microsoft.com/office/drawing/2014/main" id="{C1938AE3-9CC2-4CD5-8984-4856B9C41135}"/>
+                <a16:creationId xmlns:a16="http://schemas.microsoft.com/office/drawing/2014/main" id="{6B50883F-9DB8-4B72-8DD1-8FD0EF2AEFB2}"/>
               </a:ext>
             </a:extLst>
           </p:cNvPr>
@@ -2227,7 +2227,7 @@
           <p:cNvPr id="9" name="">
             <a:extLst xmlns:a="http://schemas.openxmlformats.org/drawingml/2006/main">
               <a:ext uri="{FF2B5EF4-FFF2-40B4-BE49-F238E27FC236}">
-                <a16:creationId xmlns:a16="http://schemas.microsoft.com/office/drawing/2014/main" id="{118560EE-64DC-4DAE-8964-9A9DC8952495}"/>
+                <a16:creationId xmlns:a16="http://schemas.microsoft.com/office/drawing/2014/main" id="{E96E7525-FEAC-4233-8307-52EF438ECFAC}"/>
               </a:ext>
             </a:extLst>
           </p:cNvPr>
@@ -2284,7 +2284,7 @@
           <p:cNvPr id="10" name="">
             <a:extLst xmlns:a="http://schemas.openxmlformats.org/drawingml/2006/main">
               <a:ext uri="{FF2B5EF4-FFF2-40B4-BE49-F238E27FC236}">
-                <a16:creationId xmlns:a16="http://schemas.microsoft.com/office/drawing/2014/main" id="{7AB8FF2B-3E81-4644-9445-53F621A63AB2}"/>
+                <a16:creationId xmlns:a16="http://schemas.microsoft.com/office/drawing/2014/main" id="{6BA7FB05-6567-4290-8017-9358F4618F7C}"/>
               </a:ext>
             </a:extLst>
           </p:cNvPr>
@@ -2341,7 +2341,7 @@
           <p:cNvPr id="11" name="">
             <a:extLst xmlns:a="http://schemas.openxmlformats.org/drawingml/2006/main">
               <a:ext uri="{FF2B5EF4-FFF2-40B4-BE49-F238E27FC236}">
-                <a16:creationId xmlns:a16="http://schemas.microsoft.com/office/drawing/2014/main" id="{B7C4DC19-9986-4130-B17E-14C91E0F2B06}"/>
+                <a16:creationId xmlns:a16="http://schemas.microsoft.com/office/drawing/2014/main" id="{9B3F06C2-F9C3-46F4-9C38-7A7565F79EBA}"/>
               </a:ext>
             </a:extLst>
           </p:cNvPr>
@@ -2396,7 +2396,7 @@
     </p:spTree>
     <p:extLst>
       <p:ext uri="{BB962C8B-B14F-4D97-AF65-F5344CB8AC3E}">
-        <p14:creationId xmlns:p14="http://schemas.microsoft.com/office/powerpoint/2010/main" val="597281850"/>
+        <p14:creationId xmlns:p14="http://schemas.microsoft.com/office/powerpoint/2010/main" val="999380933"/>
       </p:ext>
     </p:extLst>
   </p:cSld>
@@ -2427,7 +2427,7 @@
           <p:cNvPr id="14" name="">
             <a:extLst xmlns:a="http://schemas.openxmlformats.org/drawingml/2006/main">
               <a:ext uri="{FF2B5EF4-FFF2-40B4-BE49-F238E27FC236}">
-                <a16:creationId xmlns:a16="http://schemas.microsoft.com/office/drawing/2014/main" id="{E9164357-49EC-40E9-A33E-672BBDD9F8EF}"/>
+                <a16:creationId xmlns:a16="http://schemas.microsoft.com/office/drawing/2014/main" id="{8D229B62-7F0B-4948-8B6C-90272341A9F9}"/>
               </a:ext>
             </a:extLst>
           </p:cNvPr>
@@ -2459,7 +2459,7 @@
           <p:cNvPr id="2" name="">
             <a:extLst xmlns:a="http://schemas.openxmlformats.org/drawingml/2006/main">
               <a:ext uri="{FF2B5EF4-FFF2-40B4-BE49-F238E27FC236}">
-                <a16:creationId xmlns:a16="http://schemas.microsoft.com/office/drawing/2014/main" id="{51CAF5DD-4F3F-4947-B630-A043A2000C5E}"/>
+                <a16:creationId xmlns:a16="http://schemas.microsoft.com/office/drawing/2014/main" id="{BE058732-B00C-4511-B16A-1E124C36CDBF}"/>
               </a:ext>
             </a:extLst>
           </p:cNvPr>
@@ -2516,7 +2516,7 @@
           <p:cNvPr id="3" name="">
             <a:extLst xmlns:a="http://schemas.openxmlformats.org/drawingml/2006/main">
               <a:ext uri="{FF2B5EF4-FFF2-40B4-BE49-F238E27FC236}">
-                <a16:creationId xmlns:a16="http://schemas.microsoft.com/office/drawing/2014/main" id="{D3776660-3815-4B9D-A633-1B006CA52556}"/>
+                <a16:creationId xmlns:a16="http://schemas.microsoft.com/office/drawing/2014/main" id="{E6FC12EA-EEE5-43E5-9457-5C4A4F70CBA6}"/>
               </a:ext>
             </a:extLst>
           </p:cNvPr>
@@ -2548,7 +2548,7 @@
           <p:cNvPr id="4" name="">
             <a:extLst xmlns:a="http://schemas.openxmlformats.org/drawingml/2006/main">
               <a:ext uri="{FF2B5EF4-FFF2-40B4-BE49-F238E27FC236}">
-                <a16:creationId xmlns:a16="http://schemas.microsoft.com/office/drawing/2014/main" id="{E5AA25F2-439F-4677-B56A-DCBEC656F93B}"/>
+                <a16:creationId xmlns:a16="http://schemas.microsoft.com/office/drawing/2014/main" id="{2C142590-214F-41E2-8D53-C2C079DB9B90}"/>
               </a:ext>
             </a:extLst>
           </p:cNvPr>
@@ -2605,7 +2605,7 @@
           <p:cNvPr id="5" name="">
             <a:extLst xmlns:a="http://schemas.openxmlformats.org/drawingml/2006/main">
               <a:ext uri="{FF2B5EF4-FFF2-40B4-BE49-F238E27FC236}">
-                <a16:creationId xmlns:a16="http://schemas.microsoft.com/office/drawing/2014/main" id="{0180EE02-AF19-4DFA-AEE4-7CB2F7AC20ED}"/>
+                <a16:creationId xmlns:a16="http://schemas.microsoft.com/office/drawing/2014/main" id="{1C65FA90-20A2-4E65-855B-9258DFB6C103}"/>
               </a:ext>
             </a:extLst>
           </p:cNvPr>
@@ -2662,7 +2662,7 @@
           <p:cNvPr id="6" name="">
             <a:extLst xmlns:a="http://schemas.openxmlformats.org/drawingml/2006/main">
               <a:ext uri="{FF2B5EF4-FFF2-40B4-BE49-F238E27FC236}">
-                <a16:creationId xmlns:a16="http://schemas.microsoft.com/office/drawing/2014/main" id="{1E79358D-BC5E-4262-A86D-C5FAF35FF743}"/>
+                <a16:creationId xmlns:a16="http://schemas.microsoft.com/office/drawing/2014/main" id="{7D372F3E-882E-4B3F-A033-88905DD5A2B9}"/>
               </a:ext>
             </a:extLst>
           </p:cNvPr>
@@ -2719,7 +2719,7 @@
           <p:cNvPr id="7" name="">
             <a:extLst xmlns:a="http://schemas.openxmlformats.org/drawingml/2006/main">
               <a:ext uri="{FF2B5EF4-FFF2-40B4-BE49-F238E27FC236}">
-                <a16:creationId xmlns:a16="http://schemas.microsoft.com/office/drawing/2014/main" id="{86E3CB2E-66A8-4FA3-B8BC-5B77F9983AF5}"/>
+                <a16:creationId xmlns:a16="http://schemas.microsoft.com/office/drawing/2014/main" id="{9B2E1318-1697-4F47-9B14-25176C57C584}"/>
               </a:ext>
             </a:extLst>
           </p:cNvPr>
@@ -2751,7 +2751,7 @@
           <p:cNvPr id="8" name="">
             <a:extLst xmlns:a="http://schemas.openxmlformats.org/drawingml/2006/main">
               <a:ext uri="{FF2B5EF4-FFF2-40B4-BE49-F238E27FC236}">
-                <a16:creationId xmlns:a16="http://schemas.microsoft.com/office/drawing/2014/main" id="{D2EF193E-CEEA-419C-9758-EEB95439BACE}"/>
+                <a16:creationId xmlns:a16="http://schemas.microsoft.com/office/drawing/2014/main" id="{864ABFB3-CA10-4277-A368-F2B75BF0610F}"/>
               </a:ext>
             </a:extLst>
           </p:cNvPr>
@@ -2808,7 +2808,7 @@
           <p:cNvPr id="9" name="">
             <a:extLst xmlns:a="http://schemas.openxmlformats.org/drawingml/2006/main">
               <a:ext uri="{FF2B5EF4-FFF2-40B4-BE49-F238E27FC236}">
-                <a16:creationId xmlns:a16="http://schemas.microsoft.com/office/drawing/2014/main" id="{D42758C0-96B6-4D38-AD3B-4079EF24A164}"/>
+                <a16:creationId xmlns:a16="http://schemas.microsoft.com/office/drawing/2014/main" id="{3E4EE2B0-2BFA-46CE-9EB0-55194C213CBB}"/>
               </a:ext>
             </a:extLst>
           </p:cNvPr>
@@ -2865,7 +2865,7 @@
           <p:cNvPr id="10" name="">
             <a:extLst xmlns:a="http://schemas.openxmlformats.org/drawingml/2006/main">
               <a:ext uri="{FF2B5EF4-FFF2-40B4-BE49-F238E27FC236}">
-                <a16:creationId xmlns:a16="http://schemas.microsoft.com/office/drawing/2014/main" id="{360B9E4A-91CC-4A5D-8218-9D2D0DB1CA5E}"/>
+                <a16:creationId xmlns:a16="http://schemas.microsoft.com/office/drawing/2014/main" id="{30727BE6-9251-47DC-8E8F-1CA979585C4F}"/>
               </a:ext>
             </a:extLst>
           </p:cNvPr>
@@ -2922,7 +2922,7 @@
           <p:cNvPr id="11" name="">
             <a:extLst xmlns:a="http://schemas.openxmlformats.org/drawingml/2006/main">
               <a:ext uri="{FF2B5EF4-FFF2-40B4-BE49-F238E27FC236}">
-                <a16:creationId xmlns:a16="http://schemas.microsoft.com/office/drawing/2014/main" id="{18CD27B3-E30B-4359-A56F-A9F13C03111C}"/>
+                <a16:creationId xmlns:a16="http://schemas.microsoft.com/office/drawing/2014/main" id="{4E3C2ECA-4BDA-48AA-A210-09850E207E76}"/>
               </a:ext>
             </a:extLst>
           </p:cNvPr>
@@ -2979,7 +2979,7 @@
           <p:cNvPr id="12" name="">
             <a:extLst xmlns:a="http://schemas.openxmlformats.org/drawingml/2006/main">
               <a:ext uri="{FF2B5EF4-FFF2-40B4-BE49-F238E27FC236}">
-                <a16:creationId xmlns:a16="http://schemas.microsoft.com/office/drawing/2014/main" id="{E9DED8FC-E7AD-4215-8401-80AF66EDD46C}"/>
+                <a16:creationId xmlns:a16="http://schemas.microsoft.com/office/drawing/2014/main" id="{BC8DC423-80E5-4F42-BEBB-A7FAD8BCC6E4}"/>
               </a:ext>
             </a:extLst>
           </p:cNvPr>
@@ -3036,7 +3036,7 @@
           <p:cNvPr id="13" name="">
             <a:extLst xmlns:a="http://schemas.openxmlformats.org/drawingml/2006/main">
               <a:ext uri="{FF2B5EF4-FFF2-40B4-BE49-F238E27FC236}">
-                <a16:creationId xmlns:a16="http://schemas.microsoft.com/office/drawing/2014/main" id="{1261B231-634F-4B12-94F1-59B942AEC4C8}"/>
+                <a16:creationId xmlns:a16="http://schemas.microsoft.com/office/drawing/2014/main" id="{045FE25D-4880-4CCA-A5A7-66704A2479F5}"/>
               </a:ext>
             </a:extLst>
           </p:cNvPr>
@@ -3091,7 +3091,7 @@
     </p:spTree>
     <p:extLst>
       <p:ext uri="{BB962C8B-B14F-4D97-AF65-F5344CB8AC3E}">
-        <p14:creationId xmlns:p14="http://schemas.microsoft.com/office/powerpoint/2010/main" val="1208662787"/>
+        <p14:creationId xmlns:p14="http://schemas.microsoft.com/office/powerpoint/2010/main" val="1088964748"/>
       </p:ext>
     </p:extLst>
   </p:cSld>
@@ -3292,7 +3292,7 @@
           <p:cNvPr id="19" name="">
             <a:extLst xmlns:a="http://schemas.openxmlformats.org/drawingml/2006/main">
               <a:ext uri="{FF2B5EF4-FFF2-40B4-BE49-F238E27FC236}">
-                <a16:creationId xmlns:a16="http://schemas.microsoft.com/office/drawing/2014/main" id="{9D75A56D-F19C-4F7E-B422-9A537E73C1A7}"/>
+                <a16:creationId xmlns:a16="http://schemas.microsoft.com/office/drawing/2014/main" id="{5E4C7436-BEA0-422B-AFC8-6CEB3612A4D7}"/>
               </a:ext>
             </a:extLst>
           </p:cNvPr>
@@ -3324,7 +3324,7 @@
           <p:cNvPr id="2" name="">
             <a:extLst xmlns:a="http://schemas.openxmlformats.org/drawingml/2006/main">
               <a:ext uri="{FF2B5EF4-FFF2-40B4-BE49-F238E27FC236}">
-                <a16:creationId xmlns:a16="http://schemas.microsoft.com/office/drawing/2014/main" id="{1B741115-4F80-4AFA-8FEF-FFC2B6F092DD}"/>
+                <a16:creationId xmlns:a16="http://schemas.microsoft.com/office/drawing/2014/main" id="{8082577D-5F5F-401D-963A-5D386A74DD9B}"/>
               </a:ext>
             </a:extLst>
           </p:cNvPr>
@@ -3381,7 +3381,7 @@
           <p:cNvPr id="3" name="">
             <a:extLst xmlns:a="http://schemas.openxmlformats.org/drawingml/2006/main">
               <a:ext uri="{FF2B5EF4-FFF2-40B4-BE49-F238E27FC236}">
-                <a16:creationId xmlns:a16="http://schemas.microsoft.com/office/drawing/2014/main" id="{E1245141-C700-4A32-B0CE-195E4FB55395}"/>
+                <a16:creationId xmlns:a16="http://schemas.microsoft.com/office/drawing/2014/main" id="{24252700-A331-4FBB-A587-D220CDF97730}"/>
               </a:ext>
             </a:extLst>
           </p:cNvPr>
@@ -3413,7 +3413,7 @@
           <p:cNvPr id="4" name="">
             <a:extLst xmlns:a="http://schemas.openxmlformats.org/drawingml/2006/main">
               <a:ext uri="{FF2B5EF4-FFF2-40B4-BE49-F238E27FC236}">
-                <a16:creationId xmlns:a16="http://schemas.microsoft.com/office/drawing/2014/main" id="{FA231150-F1D9-4CE0-A201-3A79FDBC1413}"/>
+                <a16:creationId xmlns:a16="http://schemas.microsoft.com/office/drawing/2014/main" id="{5B744E1C-7E5A-4DFC-895B-CDAEFC43CE08}"/>
               </a:ext>
             </a:extLst>
           </p:cNvPr>
@@ -3470,7 +3470,7 @@
           <p:cNvPr id="5" name="">
             <a:extLst xmlns:a="http://schemas.openxmlformats.org/drawingml/2006/main">
               <a:ext uri="{FF2B5EF4-FFF2-40B4-BE49-F238E27FC236}">
-                <a16:creationId xmlns:a16="http://schemas.microsoft.com/office/drawing/2014/main" id="{521F091E-1F04-47F8-BC23-9EDA85483DDC}"/>
+                <a16:creationId xmlns:a16="http://schemas.microsoft.com/office/drawing/2014/main" id="{1B9FEA7D-02D9-43F4-AB83-9F60CCEEE053}"/>
               </a:ext>
             </a:extLst>
           </p:cNvPr>
@@ -3527,7 +3527,7 @@
           <p:cNvPr id="6" name="">
             <a:extLst xmlns:a="http://schemas.openxmlformats.org/drawingml/2006/main">
               <a:ext uri="{FF2B5EF4-FFF2-40B4-BE49-F238E27FC236}">
-                <a16:creationId xmlns:a16="http://schemas.microsoft.com/office/drawing/2014/main" id="{84A48360-C25D-49D0-8972-72B58793D460}"/>
+                <a16:creationId xmlns:a16="http://schemas.microsoft.com/office/drawing/2014/main" id="{25698503-D542-45BD-9115-5BEFDF3B2BED}"/>
               </a:ext>
             </a:extLst>
           </p:cNvPr>
@@ -3584,7 +3584,7 @@
           <p:cNvPr id="7" name="">
             <a:extLst xmlns:a="http://schemas.openxmlformats.org/drawingml/2006/main">
               <a:ext uri="{FF2B5EF4-FFF2-40B4-BE49-F238E27FC236}">
-                <a16:creationId xmlns:a16="http://schemas.microsoft.com/office/drawing/2014/main" id="{C43776FB-F8E5-4DA4-A359-189DB8F66A47}"/>
+                <a16:creationId xmlns:a16="http://schemas.microsoft.com/office/drawing/2014/main" id="{3151DE9B-65D9-4CC7-A9DB-A05B9B6102B4}"/>
               </a:ext>
             </a:extLst>
           </p:cNvPr>
@@ -3616,7 +3616,7 @@
           <p:cNvPr id="8" name="">
             <a:extLst xmlns:a="http://schemas.openxmlformats.org/drawingml/2006/main">
               <a:ext uri="{FF2B5EF4-FFF2-40B4-BE49-F238E27FC236}">
-                <a16:creationId xmlns:a16="http://schemas.microsoft.com/office/drawing/2014/main" id="{6E8D098A-9824-4CC3-A574-C60666903661}"/>
+                <a16:creationId xmlns:a16="http://schemas.microsoft.com/office/drawing/2014/main" id="{D592B93F-4B43-42A6-B4BE-B154F9E25222}"/>
               </a:ext>
             </a:extLst>
           </p:cNvPr>
@@ -3673,7 +3673,7 @@
           <p:cNvPr id="9" name="">
             <a:extLst xmlns:a="http://schemas.openxmlformats.org/drawingml/2006/main">
               <a:ext uri="{FF2B5EF4-FFF2-40B4-BE49-F238E27FC236}">
-                <a16:creationId xmlns:a16="http://schemas.microsoft.com/office/drawing/2014/main" id="{84FB6B04-71C1-45B8-B8C1-D3F44E55DC79}"/>
+                <a16:creationId xmlns:a16="http://schemas.microsoft.com/office/drawing/2014/main" id="{678205F3-2686-45C9-BE0D-F6E05E9A0B9C}"/>
               </a:ext>
             </a:extLst>
           </p:cNvPr>
@@ -3730,7 +3730,7 @@
           <p:cNvPr id="10" name="">
             <a:extLst xmlns:a="http://schemas.openxmlformats.org/drawingml/2006/main">
               <a:ext uri="{FF2B5EF4-FFF2-40B4-BE49-F238E27FC236}">
-                <a16:creationId xmlns:a16="http://schemas.microsoft.com/office/drawing/2014/main" id="{B5BE0689-0069-4E63-9C3C-5615F6B51738}"/>
+                <a16:creationId xmlns:a16="http://schemas.microsoft.com/office/drawing/2014/main" id="{E77FCD21-0CE6-4B00-AD16-64EFD256039A}"/>
               </a:ext>
             </a:extLst>
           </p:cNvPr>
@@ -3787,7 +3787,7 @@
           <p:cNvPr id="11" name="">
             <a:extLst xmlns:a="http://schemas.openxmlformats.org/drawingml/2006/main">
               <a:ext uri="{FF2B5EF4-FFF2-40B4-BE49-F238E27FC236}">
-                <a16:creationId xmlns:a16="http://schemas.microsoft.com/office/drawing/2014/main" id="{BCEAD53E-86D9-4155-A3DB-9091B924C827}"/>
+                <a16:creationId xmlns:a16="http://schemas.microsoft.com/office/drawing/2014/main" id="{DE36CA7F-9EC5-45EC-89F8-876E90EBC631}"/>
               </a:ext>
             </a:extLst>
           </p:cNvPr>
@@ -3821,7 +3821,7 @@
           <p:cNvPr id="12" name="">
             <a:extLst xmlns:a="http://schemas.openxmlformats.org/drawingml/2006/main">
               <a:ext uri="{FF2B5EF4-FFF2-40B4-BE49-F238E27FC236}">
-                <a16:creationId xmlns:a16="http://schemas.microsoft.com/office/drawing/2014/main" id="{DE34F8AE-FB26-4043-ABA9-FEB813D4F3F0}"/>
+                <a16:creationId xmlns:a16="http://schemas.microsoft.com/office/drawing/2014/main" id="{57505FA0-BE1B-4A01-81F3-B2DE7CDB600A}"/>
               </a:ext>
             </a:extLst>
           </p:cNvPr>
@@ -3878,7 +3878,7 @@
           <p:cNvPr id="13" name="">
             <a:extLst xmlns:a="http://schemas.openxmlformats.org/drawingml/2006/main">
               <a:ext uri="{FF2B5EF4-FFF2-40B4-BE49-F238E27FC236}">
-                <a16:creationId xmlns:a16="http://schemas.microsoft.com/office/drawing/2014/main" id="{0345A445-2C75-4939-A8BA-D62E654EA39E}"/>
+                <a16:creationId xmlns:a16="http://schemas.microsoft.com/office/drawing/2014/main" id="{2ADC97A3-0C16-4736-961F-F94A199231F8}"/>
               </a:ext>
             </a:extLst>
           </p:cNvPr>
@@ -3935,7 +3935,7 @@
           <p:cNvPr id="14" name="">
             <a:extLst xmlns:a="http://schemas.openxmlformats.org/drawingml/2006/main">
               <a:ext uri="{FF2B5EF4-FFF2-40B4-BE49-F238E27FC236}">
-                <a16:creationId xmlns:a16="http://schemas.microsoft.com/office/drawing/2014/main" id="{81F14CB0-017C-4855-A001-575E8F891BEA}"/>
+                <a16:creationId xmlns:a16="http://schemas.microsoft.com/office/drawing/2014/main" id="{8A054D02-A81A-404C-B657-C99B5BA84BC2}"/>
               </a:ext>
             </a:extLst>
           </p:cNvPr>
@@ -3992,7 +3992,7 @@
           <p:cNvPr id="15" name="">
             <a:extLst xmlns:a="http://schemas.openxmlformats.org/drawingml/2006/main">
               <a:ext uri="{FF2B5EF4-FFF2-40B4-BE49-F238E27FC236}">
-                <a16:creationId xmlns:a16="http://schemas.microsoft.com/office/drawing/2014/main" id="{B6F7D34E-E61B-4EF5-AFBA-45166C1612D7}"/>
+                <a16:creationId xmlns:a16="http://schemas.microsoft.com/office/drawing/2014/main" id="{D72DD3DF-E21F-4C4B-99E0-9AFEE83790C8}"/>
               </a:ext>
             </a:extLst>
           </p:cNvPr>
@@ -4026,7 +4026,7 @@
           <p:cNvPr id="16" name="">
             <a:extLst xmlns:a="http://schemas.openxmlformats.org/drawingml/2006/main">
               <a:ext uri="{FF2B5EF4-FFF2-40B4-BE49-F238E27FC236}">
-                <a16:creationId xmlns:a16="http://schemas.microsoft.com/office/drawing/2014/main" id="{89D798BF-C648-4BF1-9D30-42F1510B0440}"/>
+                <a16:creationId xmlns:a16="http://schemas.microsoft.com/office/drawing/2014/main" id="{0E3A18E3-72A9-4AF0-9BF5-DF3DA9EBB22B}"/>
               </a:ext>
             </a:extLst>
           </p:cNvPr>
@@ -4083,7 +4083,7 @@
           <p:cNvPr id="17" name="">
             <a:extLst xmlns:a="http://schemas.openxmlformats.org/drawingml/2006/main">
               <a:ext uri="{FF2B5EF4-FFF2-40B4-BE49-F238E27FC236}">
-                <a16:creationId xmlns:a16="http://schemas.microsoft.com/office/drawing/2014/main" id="{DA637C04-DEE6-4161-A6C6-940DD5FA2D9F}"/>
+                <a16:creationId xmlns:a16="http://schemas.microsoft.com/office/drawing/2014/main" id="{CC5E523E-9BB9-4092-AE3C-9786345539F7}"/>
               </a:ext>
             </a:extLst>
           </p:cNvPr>
@@ -4140,7 +4140,7 @@
           <p:cNvPr id="18" name="">
             <a:extLst xmlns:a="http://schemas.openxmlformats.org/drawingml/2006/main">
               <a:ext uri="{FF2B5EF4-FFF2-40B4-BE49-F238E27FC236}">
-                <a16:creationId xmlns:a16="http://schemas.microsoft.com/office/drawing/2014/main" id="{CE264A88-CB64-49BB-92AD-63435ED46037}"/>
+                <a16:creationId xmlns:a16="http://schemas.microsoft.com/office/drawing/2014/main" id="{01D8A17D-D445-451D-AA40-87919A1E9198}"/>
               </a:ext>
             </a:extLst>
           </p:cNvPr>
@@ -4195,7 +4195,7 @@
     </p:spTree>
     <p:extLst>
       <p:ext uri="{BB962C8B-B14F-4D97-AF65-F5344CB8AC3E}">
-        <p14:creationId xmlns:p14="http://schemas.microsoft.com/office/powerpoint/2010/main" val="1970659060"/>
+        <p14:creationId xmlns:p14="http://schemas.microsoft.com/office/powerpoint/2010/main" val="715438156"/>
       </p:ext>
     </p:extLst>
   </p:cSld>
@@ -4350,7 +4350,7 @@
           <p:cNvPr id="23" name="">
             <a:extLst xmlns:a="http://schemas.openxmlformats.org/drawingml/2006/main">
               <a:ext uri="{FF2B5EF4-FFF2-40B4-BE49-F238E27FC236}">
-                <a16:creationId xmlns:a16="http://schemas.microsoft.com/office/drawing/2014/main" id="{161ADD17-39BB-4010-ADCA-C37B4A92918C}"/>
+                <a16:creationId xmlns:a16="http://schemas.microsoft.com/office/drawing/2014/main" id="{5170AA95-F8C9-4C42-9D04-8E59061CDB85}"/>
               </a:ext>
             </a:extLst>
           </p:cNvPr>
@@ -4382,7 +4382,7 @@
           <p:cNvPr id="2" name="">
             <a:extLst xmlns:a="http://schemas.openxmlformats.org/drawingml/2006/main">
               <a:ext uri="{FF2B5EF4-FFF2-40B4-BE49-F238E27FC236}">
-                <a16:creationId xmlns:a16="http://schemas.microsoft.com/office/drawing/2014/main" id="{7EEAC094-A990-4318-A588-74C7DD142DC7}"/>
+                <a16:creationId xmlns:a16="http://schemas.microsoft.com/office/drawing/2014/main" id="{FC1D6CF9-5CB4-42A0-8EE2-8CCB38E7C5C9}"/>
               </a:ext>
             </a:extLst>
           </p:cNvPr>
@@ -4439,7 +4439,7 @@
           <p:cNvPr id="3" name="">
             <a:extLst xmlns:a="http://schemas.openxmlformats.org/drawingml/2006/main">
               <a:ext uri="{FF2B5EF4-FFF2-40B4-BE49-F238E27FC236}">
-                <a16:creationId xmlns:a16="http://schemas.microsoft.com/office/drawing/2014/main" id="{EAF0AE10-EDBF-4230-B851-45776FF5764C}"/>
+                <a16:creationId xmlns:a16="http://schemas.microsoft.com/office/drawing/2014/main" id="{4968F3B6-887F-4369-B794-1037C48642FF}"/>
               </a:ext>
             </a:extLst>
           </p:cNvPr>
@@ -4471,7 +4471,7 @@
           <p:cNvPr id="4" name="">
             <a:extLst xmlns:a="http://schemas.openxmlformats.org/drawingml/2006/main">
               <a:ext uri="{FF2B5EF4-FFF2-40B4-BE49-F238E27FC236}">
-                <a16:creationId xmlns:a16="http://schemas.microsoft.com/office/drawing/2014/main" id="{A92541AD-85BB-4D98-8819-59B9354C75FD}"/>
+                <a16:creationId xmlns:a16="http://schemas.microsoft.com/office/drawing/2014/main" id="{C80F6901-693A-428B-9651-8F1821B9DE03}"/>
               </a:ext>
             </a:extLst>
           </p:cNvPr>
@@ -4528,7 +4528,7 @@
           <p:cNvPr id="5" name="">
             <a:extLst xmlns:a="http://schemas.openxmlformats.org/drawingml/2006/main">
               <a:ext uri="{FF2B5EF4-FFF2-40B4-BE49-F238E27FC236}">
-                <a16:creationId xmlns:a16="http://schemas.microsoft.com/office/drawing/2014/main" id="{03BDD131-E654-4500-A855-EAF18D81BE67}"/>
+                <a16:creationId xmlns:a16="http://schemas.microsoft.com/office/drawing/2014/main" id="{70D605D9-D214-40E4-98B4-F0528E74FF04}"/>
               </a:ext>
             </a:extLst>
           </p:cNvPr>
@@ -4585,7 +4585,7 @@
           <p:cNvPr id="6" name="">
             <a:extLst xmlns:a="http://schemas.openxmlformats.org/drawingml/2006/main">
               <a:ext uri="{FF2B5EF4-FFF2-40B4-BE49-F238E27FC236}">
-                <a16:creationId xmlns:a16="http://schemas.microsoft.com/office/drawing/2014/main" id="{A904A6F6-57C5-46E8-BF7F-9390F4FA02D2}"/>
+                <a16:creationId xmlns:a16="http://schemas.microsoft.com/office/drawing/2014/main" id="{8739933F-A777-4FC7-819B-05F54CE91062}"/>
               </a:ext>
             </a:extLst>
           </p:cNvPr>
@@ -4642,7 +4642,7 @@
           <p:cNvPr id="7" name="">
             <a:extLst xmlns:a="http://schemas.openxmlformats.org/drawingml/2006/main">
               <a:ext uri="{FF2B5EF4-FFF2-40B4-BE49-F238E27FC236}">
-                <a16:creationId xmlns:a16="http://schemas.microsoft.com/office/drawing/2014/main" id="{8B608CFA-9FAC-47A6-B17A-939FB4090019}"/>
+                <a16:creationId xmlns:a16="http://schemas.microsoft.com/office/drawing/2014/main" id="{DA834372-E13B-4A39-97D8-9236101ED5FF}"/>
               </a:ext>
             </a:extLst>
           </p:cNvPr>
@@ -4674,7 +4674,7 @@
           <p:cNvPr id="8" name="">
             <a:extLst xmlns:a="http://schemas.openxmlformats.org/drawingml/2006/main">
               <a:ext uri="{FF2B5EF4-FFF2-40B4-BE49-F238E27FC236}">
-                <a16:creationId xmlns:a16="http://schemas.microsoft.com/office/drawing/2014/main" id="{B9CEAD75-08BD-44A3-AD9F-262EBDF94846}"/>
+                <a16:creationId xmlns:a16="http://schemas.microsoft.com/office/drawing/2014/main" id="{FB0C3D00-DFAF-4718-B20E-A0928D1C6965}"/>
               </a:ext>
             </a:extLst>
           </p:cNvPr>
@@ -4731,7 +4731,7 @@
           <p:cNvPr id="9" name="">
             <a:extLst xmlns:a="http://schemas.openxmlformats.org/drawingml/2006/main">
               <a:ext uri="{FF2B5EF4-FFF2-40B4-BE49-F238E27FC236}">
-                <a16:creationId xmlns:a16="http://schemas.microsoft.com/office/drawing/2014/main" id="{9F48CC59-AF2B-4B9E-B370-6868FB2B4049}"/>
+                <a16:creationId xmlns:a16="http://schemas.microsoft.com/office/drawing/2014/main" id="{4B9B55DA-9320-412E-8398-0D7E3B7ECD54}"/>
               </a:ext>
             </a:extLst>
           </p:cNvPr>
@@ -4788,7 +4788,7 @@
           <p:cNvPr id="10" name="">
             <a:extLst xmlns:a="http://schemas.openxmlformats.org/drawingml/2006/main">
               <a:ext uri="{FF2B5EF4-FFF2-40B4-BE49-F238E27FC236}">
-                <a16:creationId xmlns:a16="http://schemas.microsoft.com/office/drawing/2014/main" id="{7F601A5C-3581-4375-9DCC-E951D7706E77}"/>
+                <a16:creationId xmlns:a16="http://schemas.microsoft.com/office/drawing/2014/main" id="{7C926B7B-5DE1-4AC1-ACE1-F286EA26DDCF}"/>
               </a:ext>
             </a:extLst>
           </p:cNvPr>
@@ -4822,7 +4822,7 @@
           <p:cNvPr id="11" name="">
             <a:extLst xmlns:a="http://schemas.openxmlformats.org/drawingml/2006/main">
               <a:ext uri="{FF2B5EF4-FFF2-40B4-BE49-F238E27FC236}">
-                <a16:creationId xmlns:a16="http://schemas.microsoft.com/office/drawing/2014/main" id="{852E5FC4-61E2-4A46-AA3C-094773071EB6}"/>
+                <a16:creationId xmlns:a16="http://schemas.microsoft.com/office/drawing/2014/main" id="{E8665E2D-E381-4F9A-8689-5034CFA9D2A7}"/>
               </a:ext>
             </a:extLst>
           </p:cNvPr>
@@ -4854,7 +4854,7 @@
           <p:cNvPr id="12" name="">
             <a:extLst xmlns:a="http://schemas.openxmlformats.org/drawingml/2006/main">
               <a:ext uri="{FF2B5EF4-FFF2-40B4-BE49-F238E27FC236}">
-                <a16:creationId xmlns:a16="http://schemas.microsoft.com/office/drawing/2014/main" id="{54ED9FF0-C3AD-4BF1-B23F-E3EFEE8E1377}"/>
+                <a16:creationId xmlns:a16="http://schemas.microsoft.com/office/drawing/2014/main" id="{8DBE8932-61C1-4DF0-B46F-8EA34A71F3A6}"/>
               </a:ext>
             </a:extLst>
           </p:cNvPr>
@@ -4911,7 +4911,7 @@
           <p:cNvPr id="13" name="">
             <a:extLst xmlns:a="http://schemas.openxmlformats.org/drawingml/2006/main">
               <a:ext uri="{FF2B5EF4-FFF2-40B4-BE49-F238E27FC236}">
-                <a16:creationId xmlns:a16="http://schemas.microsoft.com/office/drawing/2014/main" id="{E7212D85-BCFD-432A-B1B1-FF8EC8635585}"/>
+                <a16:creationId xmlns:a16="http://schemas.microsoft.com/office/drawing/2014/main" id="{6554DE91-5544-4680-9D5A-0E029A4CD336}"/>
               </a:ext>
             </a:extLst>
           </p:cNvPr>
@@ -4968,7 +4968,7 @@
           <p:cNvPr id="14" name="">
             <a:extLst xmlns:a="http://schemas.openxmlformats.org/drawingml/2006/main">
               <a:ext uri="{FF2B5EF4-FFF2-40B4-BE49-F238E27FC236}">
-                <a16:creationId xmlns:a16="http://schemas.microsoft.com/office/drawing/2014/main" id="{D0652F6E-B1C0-4A3B-9F8D-6CA412BBF4D0}"/>
+                <a16:creationId xmlns:a16="http://schemas.microsoft.com/office/drawing/2014/main" id="{BE366C56-3F46-46FE-B6ED-EC28C4068C41}"/>
               </a:ext>
             </a:extLst>
           </p:cNvPr>
@@ -5002,7 +5002,7 @@
           <p:cNvPr id="15" name="">
             <a:extLst xmlns:a="http://schemas.openxmlformats.org/drawingml/2006/main">
               <a:ext uri="{FF2B5EF4-FFF2-40B4-BE49-F238E27FC236}">
-                <a16:creationId xmlns:a16="http://schemas.microsoft.com/office/drawing/2014/main" id="{2A50CA1B-4A62-4B95-B56E-A124EF619237}"/>
+                <a16:creationId xmlns:a16="http://schemas.microsoft.com/office/drawing/2014/main" id="{BA2233E5-8584-4814-9BD7-5E84684C402F}"/>
               </a:ext>
             </a:extLst>
           </p:cNvPr>
@@ -5034,7 +5034,7 @@
           <p:cNvPr id="16" name="">
             <a:extLst xmlns:a="http://schemas.openxmlformats.org/drawingml/2006/main">
               <a:ext uri="{FF2B5EF4-FFF2-40B4-BE49-F238E27FC236}">
-                <a16:creationId xmlns:a16="http://schemas.microsoft.com/office/drawing/2014/main" id="{70B5A805-50C0-4839-84E2-21E7D77C8D70}"/>
+                <a16:creationId xmlns:a16="http://schemas.microsoft.com/office/drawing/2014/main" id="{2F173C43-4174-4C19-95DE-9C8A10E7CD08}"/>
               </a:ext>
             </a:extLst>
           </p:cNvPr>
@@ -5091,7 +5091,7 @@
           <p:cNvPr id="17" name="">
             <a:extLst xmlns:a="http://schemas.openxmlformats.org/drawingml/2006/main">
               <a:ext uri="{FF2B5EF4-FFF2-40B4-BE49-F238E27FC236}">
-                <a16:creationId xmlns:a16="http://schemas.microsoft.com/office/drawing/2014/main" id="{B527AE5F-80EC-4AEB-AED4-87976C7785E4}"/>
+                <a16:creationId xmlns:a16="http://schemas.microsoft.com/office/drawing/2014/main" id="{B2D06C36-0311-4DD0-9DDD-D357620D2DD3}"/>
               </a:ext>
             </a:extLst>
           </p:cNvPr>
@@ -5148,7 +5148,7 @@
           <p:cNvPr id="18" name="">
             <a:extLst xmlns:a="http://schemas.openxmlformats.org/drawingml/2006/main">
               <a:ext uri="{FF2B5EF4-FFF2-40B4-BE49-F238E27FC236}">
-                <a16:creationId xmlns:a16="http://schemas.microsoft.com/office/drawing/2014/main" id="{DF56A499-5DD9-41F2-8E9B-F81B6B83A018}"/>
+                <a16:creationId xmlns:a16="http://schemas.microsoft.com/office/drawing/2014/main" id="{A6D8274A-A4EE-4C2E-B52F-05BE82DD8E6F}"/>
               </a:ext>
             </a:extLst>
           </p:cNvPr>
@@ -5182,7 +5182,7 @@
           <p:cNvPr id="19" name="">
             <a:extLst xmlns:a="http://schemas.openxmlformats.org/drawingml/2006/main">
               <a:ext uri="{FF2B5EF4-FFF2-40B4-BE49-F238E27FC236}">
-                <a16:creationId xmlns:a16="http://schemas.microsoft.com/office/drawing/2014/main" id="{B9063DF9-6CD8-454C-8E0A-01B80BD32420}"/>
+                <a16:creationId xmlns:a16="http://schemas.microsoft.com/office/drawing/2014/main" id="{006BFE54-BD9C-40C8-A235-F21E2B2BAE5C}"/>
               </a:ext>
             </a:extLst>
           </p:cNvPr>
@@ -5214,7 +5214,7 @@
           <p:cNvPr id="20" name="">
             <a:extLst xmlns:a="http://schemas.openxmlformats.org/drawingml/2006/main">
               <a:ext uri="{FF2B5EF4-FFF2-40B4-BE49-F238E27FC236}">
-                <a16:creationId xmlns:a16="http://schemas.microsoft.com/office/drawing/2014/main" id="{48F16CE4-0FD3-44AF-8CA0-A13BEB585607}"/>
+                <a16:creationId xmlns:a16="http://schemas.microsoft.com/office/drawing/2014/main" id="{3AE12EE5-1B3E-4081-92D2-9BF5F9ECFC69}"/>
               </a:ext>
             </a:extLst>
           </p:cNvPr>
@@ -5271,7 +5271,7 @@
           <p:cNvPr id="21" name="">
             <a:extLst xmlns:a="http://schemas.openxmlformats.org/drawingml/2006/main">
               <a:ext uri="{FF2B5EF4-FFF2-40B4-BE49-F238E27FC236}">
-                <a16:creationId xmlns:a16="http://schemas.microsoft.com/office/drawing/2014/main" id="{03AA537D-30EA-473D-A7BB-F4C662A52B85}"/>
+                <a16:creationId xmlns:a16="http://schemas.microsoft.com/office/drawing/2014/main" id="{42D04455-F966-4D5B-B4B0-690248FE9F05}"/>
               </a:ext>
             </a:extLst>
           </p:cNvPr>
@@ -5328,7 +5328,7 @@
           <p:cNvPr id="22" name="">
             <a:extLst xmlns:a="http://schemas.openxmlformats.org/drawingml/2006/main">
               <a:ext uri="{FF2B5EF4-FFF2-40B4-BE49-F238E27FC236}">
-                <a16:creationId xmlns:a16="http://schemas.microsoft.com/office/drawing/2014/main" id="{DC4EB883-6D04-4948-B52E-CE24FDA16977}"/>
+                <a16:creationId xmlns:a16="http://schemas.microsoft.com/office/drawing/2014/main" id="{27B132D9-4ACF-44F4-806A-66F28441460B}"/>
               </a:ext>
             </a:extLst>
           </p:cNvPr>
@@ -5383,7 +5383,7 @@
     </p:spTree>
     <p:extLst>
       <p:ext uri="{BB962C8B-B14F-4D97-AF65-F5344CB8AC3E}">
-        <p14:creationId xmlns:p14="http://schemas.microsoft.com/office/powerpoint/2010/main" val="514713607"/>
+        <p14:creationId xmlns:p14="http://schemas.microsoft.com/office/powerpoint/2010/main" val="717130305"/>
       </p:ext>
     </p:extLst>
   </p:cSld>
@@ -5584,7 +5584,7 @@
           <p:cNvPr id="23" name="">
             <a:extLst xmlns:a="http://schemas.openxmlformats.org/drawingml/2006/main">
               <a:ext uri="{FF2B5EF4-FFF2-40B4-BE49-F238E27FC236}">
-                <a16:creationId xmlns:a16="http://schemas.microsoft.com/office/drawing/2014/main" id="{3C953A83-F26A-4260-B86C-7311EFB0404F}"/>
+                <a16:creationId xmlns:a16="http://schemas.microsoft.com/office/drawing/2014/main" id="{37F5D0DB-9960-4376-86F5-D7DDF6B2B91A}"/>
               </a:ext>
             </a:extLst>
           </p:cNvPr>
@@ -5616,7 +5616,7 @@
           <p:cNvPr id="2" name="">
             <a:extLst xmlns:a="http://schemas.openxmlformats.org/drawingml/2006/main">
               <a:ext uri="{FF2B5EF4-FFF2-40B4-BE49-F238E27FC236}">
-                <a16:creationId xmlns:a16="http://schemas.microsoft.com/office/drawing/2014/main" id="{39535ED1-7A35-49AF-8EA9-C537651AEF15}"/>
+                <a16:creationId xmlns:a16="http://schemas.microsoft.com/office/drawing/2014/main" id="{A5DF7315-C7CC-4949-B39D-BA0AEE4801AB}"/>
               </a:ext>
             </a:extLst>
           </p:cNvPr>
@@ -5673,7 +5673,7 @@
           <p:cNvPr id="3" name="">
             <a:extLst xmlns:a="http://schemas.openxmlformats.org/drawingml/2006/main">
               <a:ext uri="{FF2B5EF4-FFF2-40B4-BE49-F238E27FC236}">
-                <a16:creationId xmlns:a16="http://schemas.microsoft.com/office/drawing/2014/main" id="{15677031-A14D-4275-8682-42A989DA0B47}"/>
+                <a16:creationId xmlns:a16="http://schemas.microsoft.com/office/drawing/2014/main" id="{84BFA560-FB25-4795-856D-5A3951CA57FF}"/>
               </a:ext>
             </a:extLst>
           </p:cNvPr>
@@ -5705,7 +5705,7 @@
           <p:cNvPr id="4" name="">
             <a:extLst xmlns:a="http://schemas.openxmlformats.org/drawingml/2006/main">
               <a:ext uri="{FF2B5EF4-FFF2-40B4-BE49-F238E27FC236}">
-                <a16:creationId xmlns:a16="http://schemas.microsoft.com/office/drawing/2014/main" id="{0F698182-E103-472C-8E9B-D87B69B7925B}"/>
+                <a16:creationId xmlns:a16="http://schemas.microsoft.com/office/drawing/2014/main" id="{BF769579-AEC0-4E23-B324-4B5BA13085D2}"/>
               </a:ext>
             </a:extLst>
           </p:cNvPr>
@@ -5762,7 +5762,7 @@
           <p:cNvPr id="5" name="">
             <a:extLst xmlns:a="http://schemas.openxmlformats.org/drawingml/2006/main">
               <a:ext uri="{FF2B5EF4-FFF2-40B4-BE49-F238E27FC236}">
-                <a16:creationId xmlns:a16="http://schemas.microsoft.com/office/drawing/2014/main" id="{9A67D3D2-A1EC-48FF-B2E7-B66D72405DB7}"/>
+                <a16:creationId xmlns:a16="http://schemas.microsoft.com/office/drawing/2014/main" id="{8DBAC50A-DDCE-440A-AF69-E4889FC957E8}"/>
               </a:ext>
             </a:extLst>
           </p:cNvPr>
@@ -5819,7 +5819,7 @@
           <p:cNvPr id="6" name="">
             <a:extLst xmlns:a="http://schemas.openxmlformats.org/drawingml/2006/main">
               <a:ext uri="{FF2B5EF4-FFF2-40B4-BE49-F238E27FC236}">
-                <a16:creationId xmlns:a16="http://schemas.microsoft.com/office/drawing/2014/main" id="{8BBC2DEB-C95E-484A-8E0E-6398D6B9C5F4}"/>
+                <a16:creationId xmlns:a16="http://schemas.microsoft.com/office/drawing/2014/main" id="{1CC0EE8E-F5AE-473A-A850-A4B0336BEF6E}"/>
               </a:ext>
             </a:extLst>
           </p:cNvPr>
@@ -5876,7 +5876,7 @@
           <p:cNvPr id="7" name="">
             <a:extLst xmlns:a="http://schemas.openxmlformats.org/drawingml/2006/main">
               <a:ext uri="{FF2B5EF4-FFF2-40B4-BE49-F238E27FC236}">
-                <a16:creationId xmlns:a16="http://schemas.microsoft.com/office/drawing/2014/main" id="{677865A3-7D1C-45E5-8CFF-404E0C624683}"/>
+                <a16:creationId xmlns:a16="http://schemas.microsoft.com/office/drawing/2014/main" id="{B79D2C46-5451-4B49-B8CA-C114D14363DD}"/>
               </a:ext>
             </a:extLst>
           </p:cNvPr>
@@ -5908,7 +5908,7 @@
           <p:cNvPr id="8" name="">
             <a:extLst xmlns:a="http://schemas.openxmlformats.org/drawingml/2006/main">
               <a:ext uri="{FF2B5EF4-FFF2-40B4-BE49-F238E27FC236}">
-                <a16:creationId xmlns:a16="http://schemas.microsoft.com/office/drawing/2014/main" id="{FD631FD5-8AAF-4A33-916A-EF679CDFF8B1}"/>
+                <a16:creationId xmlns:a16="http://schemas.microsoft.com/office/drawing/2014/main" id="{8801499E-8149-4798-962F-23814DA3DE16}"/>
               </a:ext>
             </a:extLst>
           </p:cNvPr>
@@ -5965,7 +5965,7 @@
           <p:cNvPr id="9" name="">
             <a:extLst xmlns:a="http://schemas.openxmlformats.org/drawingml/2006/main">
               <a:ext uri="{FF2B5EF4-FFF2-40B4-BE49-F238E27FC236}">
-                <a16:creationId xmlns:a16="http://schemas.microsoft.com/office/drawing/2014/main" id="{DF3E16E5-AA98-4E3E-B88A-EF8AD5343CC8}"/>
+                <a16:creationId xmlns:a16="http://schemas.microsoft.com/office/drawing/2014/main" id="{283DF835-BFA5-4BB6-9D6A-07A7E5C87130}"/>
               </a:ext>
             </a:extLst>
           </p:cNvPr>
@@ -6022,7 +6022,7 @@
           <p:cNvPr id="10" name="">
             <a:extLst xmlns:a="http://schemas.openxmlformats.org/drawingml/2006/main">
               <a:ext uri="{FF2B5EF4-FFF2-40B4-BE49-F238E27FC236}">
-                <a16:creationId xmlns:a16="http://schemas.microsoft.com/office/drawing/2014/main" id="{4269A725-2B0F-4F1F-A0AF-673461E8B1DE}"/>
+                <a16:creationId xmlns:a16="http://schemas.microsoft.com/office/drawing/2014/main" id="{78290EEA-F777-48C9-9F2D-1DBBE34B4E56}"/>
               </a:ext>
             </a:extLst>
           </p:cNvPr>
@@ -6056,7 +6056,7 @@
           <p:cNvPr id="11" name="">
             <a:extLst xmlns:a="http://schemas.openxmlformats.org/drawingml/2006/main">
               <a:ext uri="{FF2B5EF4-FFF2-40B4-BE49-F238E27FC236}">
-                <a16:creationId xmlns:a16="http://schemas.microsoft.com/office/drawing/2014/main" id="{E088721C-7687-47E1-8089-6B05F874B47D}"/>
+                <a16:creationId xmlns:a16="http://schemas.microsoft.com/office/drawing/2014/main" id="{F16A3ECA-8088-4ECC-B3F8-03712F11E9BD}"/>
               </a:ext>
             </a:extLst>
           </p:cNvPr>
@@ -6088,7 +6088,7 @@
           <p:cNvPr id="12" name="">
             <a:extLst xmlns:a="http://schemas.openxmlformats.org/drawingml/2006/main">
               <a:ext uri="{FF2B5EF4-FFF2-40B4-BE49-F238E27FC236}">
-                <a16:creationId xmlns:a16="http://schemas.microsoft.com/office/drawing/2014/main" id="{EDE71DC7-CD7F-4E12-B4D7-30604A33811E}"/>
+                <a16:creationId xmlns:a16="http://schemas.microsoft.com/office/drawing/2014/main" id="{3D961523-B28E-4ACA-AECE-91880E380129}"/>
               </a:ext>
             </a:extLst>
           </p:cNvPr>
@@ -6145,7 +6145,7 @@
           <p:cNvPr id="13" name="">
             <a:extLst xmlns:a="http://schemas.openxmlformats.org/drawingml/2006/main">
               <a:ext uri="{FF2B5EF4-FFF2-40B4-BE49-F238E27FC236}">
-                <a16:creationId xmlns:a16="http://schemas.microsoft.com/office/drawing/2014/main" id="{E4F63825-F135-4569-A3DC-02C55602D4C9}"/>
+                <a16:creationId xmlns:a16="http://schemas.microsoft.com/office/drawing/2014/main" id="{B343F9F6-B2E9-4B15-8292-4642B1817236}"/>
               </a:ext>
             </a:extLst>
           </p:cNvPr>
@@ -6202,7 +6202,7 @@
           <p:cNvPr id="14" name="">
             <a:extLst xmlns:a="http://schemas.openxmlformats.org/drawingml/2006/main">
               <a:ext uri="{FF2B5EF4-FFF2-40B4-BE49-F238E27FC236}">
-                <a16:creationId xmlns:a16="http://schemas.microsoft.com/office/drawing/2014/main" id="{F522644D-8168-4103-86B0-428208AA887D}"/>
+                <a16:creationId xmlns:a16="http://schemas.microsoft.com/office/drawing/2014/main" id="{0B0EC0A5-31CA-4DB1-A236-278A95F84FF5}"/>
               </a:ext>
             </a:extLst>
           </p:cNvPr>
@@ -6236,7 +6236,7 @@
           <p:cNvPr id="15" name="">
             <a:extLst xmlns:a="http://schemas.openxmlformats.org/drawingml/2006/main">
               <a:ext uri="{FF2B5EF4-FFF2-40B4-BE49-F238E27FC236}">
-                <a16:creationId xmlns:a16="http://schemas.microsoft.com/office/drawing/2014/main" id="{A6DEADB5-4E03-40D5-BA93-977F583BD119}"/>
+                <a16:creationId xmlns:a16="http://schemas.microsoft.com/office/drawing/2014/main" id="{2F19A89C-F926-4649-9328-4DE60C6FFC36}"/>
               </a:ext>
             </a:extLst>
           </p:cNvPr>
@@ -6268,7 +6268,7 @@
           <p:cNvPr id="16" name="">
             <a:extLst xmlns:a="http://schemas.openxmlformats.org/drawingml/2006/main">
               <a:ext uri="{FF2B5EF4-FFF2-40B4-BE49-F238E27FC236}">
-                <a16:creationId xmlns:a16="http://schemas.microsoft.com/office/drawing/2014/main" id="{95C44E93-EEE5-4A81-B261-52C7E0856102}"/>
+                <a16:creationId xmlns:a16="http://schemas.microsoft.com/office/drawing/2014/main" id="{DEB7AB79-D795-4B22-A527-F55A30127713}"/>
               </a:ext>
             </a:extLst>
           </p:cNvPr>
@@ -6325,7 +6325,7 @@
           <p:cNvPr id="17" name="">
             <a:extLst xmlns:a="http://schemas.openxmlformats.org/drawingml/2006/main">
               <a:ext uri="{FF2B5EF4-FFF2-40B4-BE49-F238E27FC236}">
-                <a16:creationId xmlns:a16="http://schemas.microsoft.com/office/drawing/2014/main" id="{03FEF561-31F5-4E77-BEC6-8A10A356D79A}"/>
+                <a16:creationId xmlns:a16="http://schemas.microsoft.com/office/drawing/2014/main" id="{08DA0D8B-A155-4818-B6F2-803EB67BAD5C}"/>
               </a:ext>
             </a:extLst>
           </p:cNvPr>
@@ -6382,7 +6382,7 @@
           <p:cNvPr id="18" name="">
             <a:extLst xmlns:a="http://schemas.openxmlformats.org/drawingml/2006/main">
               <a:ext uri="{FF2B5EF4-FFF2-40B4-BE49-F238E27FC236}">
-                <a16:creationId xmlns:a16="http://schemas.microsoft.com/office/drawing/2014/main" id="{1F492B65-003E-49A8-A1B8-E75956B8C2AD}"/>
+                <a16:creationId xmlns:a16="http://schemas.microsoft.com/office/drawing/2014/main" id="{82AABA5B-4378-4DD2-A05A-7C035E41E15B}"/>
               </a:ext>
             </a:extLst>
           </p:cNvPr>
@@ -6416,7 +6416,7 @@
           <p:cNvPr id="19" name="">
             <a:extLst xmlns:a="http://schemas.openxmlformats.org/drawingml/2006/main">
               <a:ext uri="{FF2B5EF4-FFF2-40B4-BE49-F238E27FC236}">
-                <a16:creationId xmlns:a16="http://schemas.microsoft.com/office/drawing/2014/main" id="{1546C517-69F8-4CC3-AF10-2EAFCFD06144}"/>
+                <a16:creationId xmlns:a16="http://schemas.microsoft.com/office/drawing/2014/main" id="{D5790BB5-3943-43FA-8E1B-A772FE0C6AA6}"/>
               </a:ext>
             </a:extLst>
           </p:cNvPr>
@@ -6448,7 +6448,7 @@
           <p:cNvPr id="20" name="">
             <a:extLst xmlns:a="http://schemas.openxmlformats.org/drawingml/2006/main">
               <a:ext uri="{FF2B5EF4-FFF2-40B4-BE49-F238E27FC236}">
-                <a16:creationId xmlns:a16="http://schemas.microsoft.com/office/drawing/2014/main" id="{1403D443-1CB2-484E-8058-AA93938F5A26}"/>
+                <a16:creationId xmlns:a16="http://schemas.microsoft.com/office/drawing/2014/main" id="{B2645DCE-F96E-41E6-835D-DC44B3C11648}"/>
               </a:ext>
             </a:extLst>
           </p:cNvPr>
@@ -6505,7 +6505,7 @@
           <p:cNvPr id="21" name="">
             <a:extLst xmlns:a="http://schemas.openxmlformats.org/drawingml/2006/main">
               <a:ext uri="{FF2B5EF4-FFF2-40B4-BE49-F238E27FC236}">
-                <a16:creationId xmlns:a16="http://schemas.microsoft.com/office/drawing/2014/main" id="{D7275C45-8654-49FF-BF92-A52B620CB493}"/>
+                <a16:creationId xmlns:a16="http://schemas.microsoft.com/office/drawing/2014/main" id="{AC2DAD32-F356-44E3-B81A-B29D4A081E15}"/>
               </a:ext>
             </a:extLst>
           </p:cNvPr>
@@ -6562,7 +6562,7 @@
           <p:cNvPr id="22" name="">
             <a:extLst xmlns:a="http://schemas.openxmlformats.org/drawingml/2006/main">
               <a:ext uri="{FF2B5EF4-FFF2-40B4-BE49-F238E27FC236}">
-                <a16:creationId xmlns:a16="http://schemas.microsoft.com/office/drawing/2014/main" id="{BD645AA5-75D0-4901-991E-74D314D8247E}"/>
+                <a16:creationId xmlns:a16="http://schemas.microsoft.com/office/drawing/2014/main" id="{6089DB03-C565-4FA2-B98E-9587E31449E6}"/>
               </a:ext>
             </a:extLst>
           </p:cNvPr>
@@ -6617,7 +6617,7 @@
     </p:spTree>
     <p:extLst>
       <p:ext uri="{BB962C8B-B14F-4D97-AF65-F5344CB8AC3E}">
-        <p14:creationId xmlns:p14="http://schemas.microsoft.com/office/powerpoint/2010/main" val="1643383269"/>
+        <p14:creationId xmlns:p14="http://schemas.microsoft.com/office/powerpoint/2010/main" val="370499568"/>
       </p:ext>
     </p:extLst>
   </p:cSld>
@@ -6818,7 +6818,7 @@
           <p:cNvPr id="16" name="">
             <a:extLst xmlns:a="http://schemas.openxmlformats.org/drawingml/2006/main">
               <a:ext uri="{FF2B5EF4-FFF2-40B4-BE49-F238E27FC236}">
-                <a16:creationId xmlns:a16="http://schemas.microsoft.com/office/drawing/2014/main" id="{9B61A7E4-0D37-4924-88F1-55226790B62E}"/>
+                <a16:creationId xmlns:a16="http://schemas.microsoft.com/office/drawing/2014/main" id="{B42A68C5-5751-4636-851C-A74DBB353E12}"/>
               </a:ext>
             </a:extLst>
           </p:cNvPr>
@@ -6850,7 +6850,7 @@
           <p:cNvPr id="2" name="">
             <a:extLst xmlns:a="http://schemas.openxmlformats.org/drawingml/2006/main">
               <a:ext uri="{FF2B5EF4-FFF2-40B4-BE49-F238E27FC236}">
-                <a16:creationId xmlns:a16="http://schemas.microsoft.com/office/drawing/2014/main" id="{5EB09BA4-EFA9-4003-899F-468E0D27295F}"/>
+                <a16:creationId xmlns:a16="http://schemas.microsoft.com/office/drawing/2014/main" id="{B663D113-6F16-4F2A-9073-39B1798EEBFE}"/>
               </a:ext>
             </a:extLst>
           </p:cNvPr>
@@ -6907,7 +6907,7 @@
           <p:cNvPr id="3" name="">
             <a:extLst xmlns:a="http://schemas.openxmlformats.org/drawingml/2006/main">
               <a:ext uri="{FF2B5EF4-FFF2-40B4-BE49-F238E27FC236}">
-                <a16:creationId xmlns:a16="http://schemas.microsoft.com/office/drawing/2014/main" id="{580F9736-DC7B-4FE8-9F45-61FE33FDE6D3}"/>
+                <a16:creationId xmlns:a16="http://schemas.microsoft.com/office/drawing/2014/main" id="{F80167CC-C992-4AA9-9BCE-55422A656755}"/>
               </a:ext>
             </a:extLst>
           </p:cNvPr>
@@ -6939,7 +6939,7 @@
           <p:cNvPr id="4" name="">
             <a:extLst xmlns:a="http://schemas.openxmlformats.org/drawingml/2006/main">
               <a:ext uri="{FF2B5EF4-FFF2-40B4-BE49-F238E27FC236}">
-                <a16:creationId xmlns:a16="http://schemas.microsoft.com/office/drawing/2014/main" id="{BAFA45D3-AA82-4CAC-B7B3-39755AB5CDF6}"/>
+                <a16:creationId xmlns:a16="http://schemas.microsoft.com/office/drawing/2014/main" id="{6518A67F-5D20-4F71-B70D-2A881B51BC22}"/>
               </a:ext>
             </a:extLst>
           </p:cNvPr>
@@ -6996,7 +6996,7 @@
           <p:cNvPr id="5" name="">
             <a:extLst xmlns:a="http://schemas.openxmlformats.org/drawingml/2006/main">
               <a:ext uri="{FF2B5EF4-FFF2-40B4-BE49-F238E27FC236}">
-                <a16:creationId xmlns:a16="http://schemas.microsoft.com/office/drawing/2014/main" id="{732CECD9-9F10-48A6-B68C-5CE2B10801C4}"/>
+                <a16:creationId xmlns:a16="http://schemas.microsoft.com/office/drawing/2014/main" id="{5EAB0731-341E-406F-BBD1-A3A7FD6655A0}"/>
               </a:ext>
             </a:extLst>
           </p:cNvPr>
@@ -7053,7 +7053,7 @@
           <p:cNvPr id="6" name="">
             <a:extLst xmlns:a="http://schemas.openxmlformats.org/drawingml/2006/main">
               <a:ext uri="{FF2B5EF4-FFF2-40B4-BE49-F238E27FC236}">
-                <a16:creationId xmlns:a16="http://schemas.microsoft.com/office/drawing/2014/main" id="{E0070414-B159-4555-94E9-A09C25F25A5C}"/>
+                <a16:creationId xmlns:a16="http://schemas.microsoft.com/office/drawing/2014/main" id="{A012539A-A5B0-4259-965F-E8632404C10E}"/>
               </a:ext>
             </a:extLst>
           </p:cNvPr>
@@ -7110,7 +7110,7 @@
           <p:cNvPr id="7" name="">
             <a:extLst xmlns:a="http://schemas.openxmlformats.org/drawingml/2006/main">
               <a:ext uri="{FF2B5EF4-FFF2-40B4-BE49-F238E27FC236}">
-                <a16:creationId xmlns:a16="http://schemas.microsoft.com/office/drawing/2014/main" id="{B6D5C9DF-F491-4C08-99F0-8DE298FDCF27}"/>
+                <a16:creationId xmlns:a16="http://schemas.microsoft.com/office/drawing/2014/main" id="{ED91E941-7655-4381-8613-CB1F63257D1E}"/>
               </a:ext>
             </a:extLst>
           </p:cNvPr>
@@ -7142,7 +7142,7 @@
           <p:cNvPr id="8" name="">
             <a:extLst xmlns:a="http://schemas.openxmlformats.org/drawingml/2006/main">
               <a:ext uri="{FF2B5EF4-FFF2-40B4-BE49-F238E27FC236}">
-                <a16:creationId xmlns:a16="http://schemas.microsoft.com/office/drawing/2014/main" id="{07774BB6-8C07-4444-99AD-20BE29DC8493}"/>
+                <a16:creationId xmlns:a16="http://schemas.microsoft.com/office/drawing/2014/main" id="{8DB8CD9C-6785-4E5B-A097-8999EA6B6635}"/>
               </a:ext>
             </a:extLst>
           </p:cNvPr>
@@ -7199,7 +7199,7 @@
           <p:cNvPr id="9" name="">
             <a:extLst xmlns:a="http://schemas.openxmlformats.org/drawingml/2006/main">
               <a:ext uri="{FF2B5EF4-FFF2-40B4-BE49-F238E27FC236}">
-                <a16:creationId xmlns:a16="http://schemas.microsoft.com/office/drawing/2014/main" id="{141A4306-8FDC-4337-9A52-28A4C6EB96FF}"/>
+                <a16:creationId xmlns:a16="http://schemas.microsoft.com/office/drawing/2014/main" id="{11009580-C503-4DE6-A8EB-29B08F974461}"/>
               </a:ext>
             </a:extLst>
           </p:cNvPr>
@@ -7256,7 +7256,7 @@
           <p:cNvPr id="10" name="">
             <a:extLst xmlns:a="http://schemas.openxmlformats.org/drawingml/2006/main">
               <a:ext uri="{FF2B5EF4-FFF2-40B4-BE49-F238E27FC236}">
-                <a16:creationId xmlns:a16="http://schemas.microsoft.com/office/drawing/2014/main" id="{698819D4-56EC-47FF-BCE0-13109B152F6B}"/>
+                <a16:creationId xmlns:a16="http://schemas.microsoft.com/office/drawing/2014/main" id="{7A6E15FB-C03B-41D5-8479-000CFF2F2538}"/>
               </a:ext>
             </a:extLst>
           </p:cNvPr>
@@ -7313,7 +7313,7 @@
           <p:cNvPr id="11" name="">
             <a:extLst xmlns:a="http://schemas.openxmlformats.org/drawingml/2006/main">
               <a:ext uri="{FF2B5EF4-FFF2-40B4-BE49-F238E27FC236}">
-                <a16:creationId xmlns:a16="http://schemas.microsoft.com/office/drawing/2014/main" id="{D522C554-3213-402E-BAF5-770928D2D9DF}"/>
+                <a16:creationId xmlns:a16="http://schemas.microsoft.com/office/drawing/2014/main" id="{846CA760-1504-4434-80C3-1CB2E302FBB4}"/>
               </a:ext>
             </a:extLst>
           </p:cNvPr>
@@ -7345,7 +7345,7 @@
           <p:cNvPr id="12" name="">
             <a:extLst xmlns:a="http://schemas.openxmlformats.org/drawingml/2006/main">
               <a:ext uri="{FF2B5EF4-FFF2-40B4-BE49-F238E27FC236}">
-                <a16:creationId xmlns:a16="http://schemas.microsoft.com/office/drawing/2014/main" id="{9348429F-6B2F-48C6-B5F3-E556E40EC829}"/>
+                <a16:creationId xmlns:a16="http://schemas.microsoft.com/office/drawing/2014/main" id="{D379DA60-6CD0-4530-92A8-C86F07E1FCF3}"/>
               </a:ext>
             </a:extLst>
           </p:cNvPr>
@@ -7402,7 +7402,7 @@
           <p:cNvPr id="13" name="">
             <a:extLst xmlns:a="http://schemas.openxmlformats.org/drawingml/2006/main">
               <a:ext uri="{FF2B5EF4-FFF2-40B4-BE49-F238E27FC236}">
-                <a16:creationId xmlns:a16="http://schemas.microsoft.com/office/drawing/2014/main" id="{73CBFF1E-1DC6-491E-A257-067F33F3E60A}"/>
+                <a16:creationId xmlns:a16="http://schemas.microsoft.com/office/drawing/2014/main" id="{44BDE7AF-1718-4248-A7D3-81A84F9D0715}"/>
               </a:ext>
             </a:extLst>
           </p:cNvPr>
@@ -7459,7 +7459,7 @@
           <p:cNvPr id="14" name="">
             <a:extLst xmlns:a="http://schemas.openxmlformats.org/drawingml/2006/main">
               <a:ext uri="{FF2B5EF4-FFF2-40B4-BE49-F238E27FC236}">
-                <a16:creationId xmlns:a16="http://schemas.microsoft.com/office/drawing/2014/main" id="{2025604A-4941-440C-99F2-3E3B0B3C4924}"/>
+                <a16:creationId xmlns:a16="http://schemas.microsoft.com/office/drawing/2014/main" id="{86EE38D8-968A-4DD1-9B8B-F8C9B25753AB}"/>
               </a:ext>
             </a:extLst>
           </p:cNvPr>
@@ -7516,7 +7516,7 @@
           <p:cNvPr id="15" name="">
             <a:extLst xmlns:a="http://schemas.openxmlformats.org/drawingml/2006/main">
               <a:ext uri="{FF2B5EF4-FFF2-40B4-BE49-F238E27FC236}">
-                <a16:creationId xmlns:a16="http://schemas.microsoft.com/office/drawing/2014/main" id="{4345945E-0738-42B6-95BA-1D7611200C27}"/>
+                <a16:creationId xmlns:a16="http://schemas.microsoft.com/office/drawing/2014/main" id="{425B57B0-99BE-442E-912E-CB0F471DE22F}"/>
               </a:ext>
             </a:extLst>
           </p:cNvPr>
@@ -7571,7 +7571,7 @@
     </p:spTree>
     <p:extLst>
       <p:ext uri="{BB962C8B-B14F-4D97-AF65-F5344CB8AC3E}">
-        <p14:creationId xmlns:p14="http://schemas.microsoft.com/office/powerpoint/2010/main" val="1506552630"/>
+        <p14:creationId xmlns:p14="http://schemas.microsoft.com/office/powerpoint/2010/main" val="1840060287"/>
       </p:ext>
     </p:extLst>
   </p:cSld>
@@ -7772,7 +7772,7 @@
           <p:cNvPr id="23" name="">
             <a:extLst xmlns:a="http://schemas.openxmlformats.org/drawingml/2006/main">
               <a:ext uri="{FF2B5EF4-FFF2-40B4-BE49-F238E27FC236}">
-                <a16:creationId xmlns:a16="http://schemas.microsoft.com/office/drawing/2014/main" id="{6C785A59-EE6F-4AA1-B306-ECAD13A0EE18}"/>
+                <a16:creationId xmlns:a16="http://schemas.microsoft.com/office/drawing/2014/main" id="{64338C02-31A6-43EB-A311-46F6580D7B68}"/>
               </a:ext>
             </a:extLst>
           </p:cNvPr>
@@ -7804,7 +7804,7 @@
           <p:cNvPr id="2" name="">
             <a:extLst xmlns:a="http://schemas.openxmlformats.org/drawingml/2006/main">
               <a:ext uri="{FF2B5EF4-FFF2-40B4-BE49-F238E27FC236}">
-                <a16:creationId xmlns:a16="http://schemas.microsoft.com/office/drawing/2014/main" id="{9C42A68D-811D-4D1E-8999-AD35454468DD}"/>
+                <a16:creationId xmlns:a16="http://schemas.microsoft.com/office/drawing/2014/main" id="{B49C9029-928B-4427-B047-AB602463A74C}"/>
               </a:ext>
             </a:extLst>
           </p:cNvPr>
@@ -7861,7 +7861,7 @@
           <p:cNvPr id="3" name="">
             <a:extLst xmlns:a="http://schemas.openxmlformats.org/drawingml/2006/main">
               <a:ext uri="{FF2B5EF4-FFF2-40B4-BE49-F238E27FC236}">
-                <a16:creationId xmlns:a16="http://schemas.microsoft.com/office/drawing/2014/main" id="{458E0FAE-7625-4BE9-B010-20BAA227DA68}"/>
+                <a16:creationId xmlns:a16="http://schemas.microsoft.com/office/drawing/2014/main" id="{3D34BE86-41CC-4A39-8C56-55642E83F60F}"/>
               </a:ext>
             </a:extLst>
           </p:cNvPr>
@@ -7893,7 +7893,7 @@
           <p:cNvPr id="4" name="">
             <a:extLst xmlns:a="http://schemas.openxmlformats.org/drawingml/2006/main">
               <a:ext uri="{FF2B5EF4-FFF2-40B4-BE49-F238E27FC236}">
-                <a16:creationId xmlns:a16="http://schemas.microsoft.com/office/drawing/2014/main" id="{B05E665E-9A76-4DCE-8C37-CB9914E1A515}"/>
+                <a16:creationId xmlns:a16="http://schemas.microsoft.com/office/drawing/2014/main" id="{D937F01B-0A4F-4436-AD37-73790EAC2852}"/>
               </a:ext>
             </a:extLst>
           </p:cNvPr>
@@ -7950,7 +7950,7 @@
           <p:cNvPr id="5" name="">
             <a:extLst xmlns:a="http://schemas.openxmlformats.org/drawingml/2006/main">
               <a:ext uri="{FF2B5EF4-FFF2-40B4-BE49-F238E27FC236}">
-                <a16:creationId xmlns:a16="http://schemas.microsoft.com/office/drawing/2014/main" id="{008F41D6-92EC-48BC-A9FB-92C619C3F277}"/>
+                <a16:creationId xmlns:a16="http://schemas.microsoft.com/office/drawing/2014/main" id="{9BF9FC6E-7199-4168-86D8-D648313077BD}"/>
               </a:ext>
             </a:extLst>
           </p:cNvPr>
@@ -8007,7 +8007,7 @@
           <p:cNvPr id="6" name="">
             <a:extLst xmlns:a="http://schemas.openxmlformats.org/drawingml/2006/main">
               <a:ext uri="{FF2B5EF4-FFF2-40B4-BE49-F238E27FC236}">
-                <a16:creationId xmlns:a16="http://schemas.microsoft.com/office/drawing/2014/main" id="{6950F888-03FB-4E2A-9EF3-34A017BC2DE6}"/>
+                <a16:creationId xmlns:a16="http://schemas.microsoft.com/office/drawing/2014/main" id="{B1388C0F-5185-4C5F-84B4-AAC33D1C408F}"/>
               </a:ext>
             </a:extLst>
           </p:cNvPr>
@@ -8064,7 +8064,7 @@
           <p:cNvPr id="7" name="">
             <a:extLst xmlns:a="http://schemas.openxmlformats.org/drawingml/2006/main">
               <a:ext uri="{FF2B5EF4-FFF2-40B4-BE49-F238E27FC236}">
-                <a16:creationId xmlns:a16="http://schemas.microsoft.com/office/drawing/2014/main" id="{B10D0131-5581-4636-82B8-71B09F4D3531}"/>
+                <a16:creationId xmlns:a16="http://schemas.microsoft.com/office/drawing/2014/main" id="{17D22813-3C53-4B1F-BB1F-AED938EC4558}"/>
               </a:ext>
             </a:extLst>
           </p:cNvPr>
@@ -8096,7 +8096,7 @@
           <p:cNvPr id="8" name="">
             <a:extLst xmlns:a="http://schemas.openxmlformats.org/drawingml/2006/main">
               <a:ext uri="{FF2B5EF4-FFF2-40B4-BE49-F238E27FC236}">
-                <a16:creationId xmlns:a16="http://schemas.microsoft.com/office/drawing/2014/main" id="{33B2B077-8523-4843-A478-E2C23E4DD48E}"/>
+                <a16:creationId xmlns:a16="http://schemas.microsoft.com/office/drawing/2014/main" id="{277E34F3-AE3A-4CF2-9DBF-96BE2CE67340}"/>
               </a:ext>
             </a:extLst>
           </p:cNvPr>
@@ -8153,7 +8153,7 @@
           <p:cNvPr id="9" name="">
             <a:extLst xmlns:a="http://schemas.openxmlformats.org/drawingml/2006/main">
               <a:ext uri="{FF2B5EF4-FFF2-40B4-BE49-F238E27FC236}">
-                <a16:creationId xmlns:a16="http://schemas.microsoft.com/office/drawing/2014/main" id="{6C992235-3B78-436F-A2C5-D084E621B784}"/>
+                <a16:creationId xmlns:a16="http://schemas.microsoft.com/office/drawing/2014/main" id="{C5AB4BEE-3CDB-4A35-8EEB-0E70C7CED527}"/>
               </a:ext>
             </a:extLst>
           </p:cNvPr>
@@ -8210,19 +8210,19 @@
           <p:cNvPr id="10" name="">
             <a:extLst xmlns:a="http://schemas.openxmlformats.org/drawingml/2006/main">
               <a:ext uri="{FF2B5EF4-FFF2-40B4-BE49-F238E27FC236}">
-                <a16:creationId xmlns:a16="http://schemas.microsoft.com/office/drawing/2014/main" id="{76F2CF42-C634-45BC-81A3-14736506B286}"/>
-              </a:ext>
-            </a:extLst>
-          </p:cNvPr>
-          <p:cNvSpPr>
-            <a:spLocks xmlns:a="http://schemas.openxmlformats.org/drawingml/2006/main" noGrp="1"/>
-          </p:cNvSpPr>
-          <p:nvPr/>
-        </p:nvSpPr>
-        <p:spPr>
-          <a:xfrm xmlns:a="http://schemas.openxmlformats.org/drawingml/2006/main">
-            <a:off x="914400" y="1257300"/>
-            <a:ext cx="10363200" cy="781050"/>
+                <a16:creationId xmlns:a16="http://schemas.microsoft.com/office/drawing/2014/main" id="{811C854F-492B-4BFD-8D5E-766CDB02A1F0}"/>
+              </a:ext>
+            </a:extLst>
+          </p:cNvPr>
+          <p:cNvSpPr>
+            <a:spLocks xmlns:a="http://schemas.openxmlformats.org/drawingml/2006/main" noGrp="1"/>
+          </p:cNvSpPr>
+          <p:nvPr/>
+        </p:nvSpPr>
+        <p:spPr>
+          <a:xfrm xmlns:a="http://schemas.openxmlformats.org/drawingml/2006/main">
+            <a:off x="857250" y="1219200"/>
+            <a:ext cx="10477500" cy="742950"/>
           </a:xfrm>
           <a:prstGeom xmlns:a="http://schemas.openxmlformats.org/drawingml/2006/main" prst="rect">
             <a:avLst/>
@@ -8239,7 +8239,7 @@
           <a:lstStyle xmlns:a="http://schemas.openxmlformats.org/drawingml/2006/main"/>
           <a:p xmlns:a="http://schemas.openxmlformats.org/drawingml/2006/main">
             <a:pPr algn="ctr">
-              <a:defRPr sz="2175" b="1">
+              <a:defRPr sz="2100" b="1">
                 <a:solidFill>
                   <a:srgbClr val="17253A"/>
                 </a:solidFill>
@@ -8249,7 +8249,7 @@
               </a:defRPr>
             </a:pPr>
             <a:r>
-              <a:rPr sz="2175" b="1">
+              <a:rPr sz="2100" b="1">
                 <a:solidFill>
                   <a:srgbClr val="17253A"/>
                 </a:solidFill>
@@ -8267,28 +8267,30 @@
           <p:cNvPr id="11" name="">
             <a:extLst xmlns:a="http://schemas.openxmlformats.org/drawingml/2006/main">
               <a:ext uri="{FF2B5EF4-FFF2-40B4-BE49-F238E27FC236}">
-                <a16:creationId xmlns:a16="http://schemas.microsoft.com/office/drawing/2014/main" id="{B0505375-B0A3-4939-A8B7-5F56E8660CC8}"/>
-              </a:ext>
-            </a:extLst>
-          </p:cNvPr>
-          <p:cNvSpPr>
-            <a:spLocks xmlns:a="http://schemas.openxmlformats.org/drawingml/2006/main" noGrp="1"/>
-          </p:cNvSpPr>
-          <p:nvPr/>
-        </p:nvSpPr>
-        <p:spPr>
-          <a:xfrm xmlns:a="http://schemas.openxmlformats.org/drawingml/2006/main">
-            <a:off x="1000125" y="2247900"/>
-            <a:ext cx="476250" cy="476250"/>
-          </a:xfrm>
-          <a:prstGeom xmlns:a="http://schemas.openxmlformats.org/drawingml/2006/main" prst="ellipse">
+                <a16:creationId xmlns:a16="http://schemas.microsoft.com/office/drawing/2014/main" id="{7A32F68B-6A0F-4C47-A00B-F172A599112F}"/>
+              </a:ext>
+            </a:extLst>
+          </p:cNvPr>
+          <p:cNvSpPr>
+            <a:spLocks xmlns:a="http://schemas.openxmlformats.org/drawingml/2006/main" noGrp="1"/>
+          </p:cNvSpPr>
+          <p:nvPr/>
+        </p:nvSpPr>
+        <p:spPr>
+          <a:xfrm xmlns:a="http://schemas.openxmlformats.org/drawingml/2006/main">
+            <a:off x="971550" y="2124075"/>
+            <a:ext cx="38100" cy="3524250"/>
+          </a:xfrm>
+          <a:prstGeom xmlns:a="http://schemas.openxmlformats.org/drawingml/2006/main" prst="rect">
             <a:avLst/>
           </a:prstGeom>
           <a:solidFill xmlns:a="http://schemas.openxmlformats.org/drawingml/2006/main">
-            <a:srgbClr val="18324A"/>
+            <a:srgbClr val="2C6E73"/>
           </a:solidFill>
           <a:ln xmlns:a="http://schemas.openxmlformats.org/drawingml/2006/main" w="0">
-            <a:noFill/>
+            <a:solidFill>
+              <a:srgbClr val="2C6E73"/>
+            </a:solidFill>
           </a:ln>
         </p:spPr>
       </p:sp>
@@ -8297,19 +8299,19 @@
           <p:cNvPr id="12" name="">
             <a:extLst xmlns:a="http://schemas.openxmlformats.org/drawingml/2006/main">
               <a:ext uri="{FF2B5EF4-FFF2-40B4-BE49-F238E27FC236}">
-                <a16:creationId xmlns:a16="http://schemas.microsoft.com/office/drawing/2014/main" id="{499595C0-E73A-4E5F-A5EC-88D24B6A2852}"/>
-              </a:ext>
-            </a:extLst>
-          </p:cNvPr>
-          <p:cNvSpPr>
-            <a:spLocks xmlns:a="http://schemas.openxmlformats.org/drawingml/2006/main" noGrp="1"/>
-          </p:cNvSpPr>
-          <p:nvPr/>
-        </p:nvSpPr>
-        <p:spPr>
-          <a:xfrm xmlns:a="http://schemas.openxmlformats.org/drawingml/2006/main">
-            <a:off x="1000125" y="2276475"/>
-            <a:ext cx="476250" cy="419100"/>
+                <a16:creationId xmlns:a16="http://schemas.microsoft.com/office/drawing/2014/main" id="{72EE22CF-DEB5-43AB-ABA3-48E6D8E88119}"/>
+              </a:ext>
+            </a:extLst>
+          </p:cNvPr>
+          <p:cNvSpPr>
+            <a:spLocks xmlns:a="http://schemas.openxmlformats.org/drawingml/2006/main" noGrp="1"/>
+          </p:cNvSpPr>
+          <p:nvPr/>
+        </p:nvSpPr>
+        <p:spPr>
+          <a:xfrm xmlns:a="http://schemas.openxmlformats.org/drawingml/2006/main">
+            <a:off x="1162050" y="2200275"/>
+            <a:ext cx="400050" cy="400050"/>
           </a:xfrm>
           <a:prstGeom xmlns:a="http://schemas.openxmlformats.org/drawingml/2006/main" prst="rect">
             <a:avLst/>
@@ -8326,9 +8328,9 @@
           <a:lstStyle xmlns:a="http://schemas.openxmlformats.org/drawingml/2006/main"/>
           <a:p xmlns:a="http://schemas.openxmlformats.org/drawingml/2006/main">
             <a:pPr algn="ctr">
-              <a:defRPr sz="1350" b="1">
-                <a:solidFill>
-                  <a:srgbClr val="FFFFFF"/>
+              <a:defRPr sz="1125" b="1">
+                <a:solidFill>
+                  <a:srgbClr val="2C6E73"/>
                 </a:solidFill>
                 <a:latin typeface="Arial"/>
                 <a:ea typeface="Arial"/>
@@ -8336,9 +8338,9 @@
               </a:defRPr>
             </a:pPr>
             <a:r>
-              <a:rPr sz="1350" b="1">
-                <a:solidFill>
-                  <a:srgbClr val="FFFFFF"/>
+              <a:rPr sz="1125" b="1">
+                <a:solidFill>
+                  <a:srgbClr val="2C6E73"/>
                 </a:solidFill>
                 <a:latin typeface="Arial"/>
                 <a:ea typeface="Arial"/>
@@ -8354,19 +8356,19 @@
           <p:cNvPr id="13" name="">
             <a:extLst xmlns:a="http://schemas.openxmlformats.org/drawingml/2006/main">
               <a:ext uri="{FF2B5EF4-FFF2-40B4-BE49-F238E27FC236}">
-                <a16:creationId xmlns:a16="http://schemas.microsoft.com/office/drawing/2014/main" id="{E23342F4-BD7C-4DAC-A803-38F75C89D3CC}"/>
-              </a:ext>
-            </a:extLst>
-          </p:cNvPr>
-          <p:cNvSpPr>
-            <a:spLocks xmlns:a="http://schemas.openxmlformats.org/drawingml/2006/main" noGrp="1"/>
-          </p:cNvSpPr>
-          <p:nvPr/>
-        </p:nvSpPr>
-        <p:spPr>
-          <a:xfrm xmlns:a="http://schemas.openxmlformats.org/drawingml/2006/main">
-            <a:off x="1714500" y="2181225"/>
-            <a:ext cx="9429750" cy="609600"/>
+                <a16:creationId xmlns:a16="http://schemas.microsoft.com/office/drawing/2014/main" id="{3F1C7AB8-307F-4E56-9157-5E9936B52F2C}"/>
+              </a:ext>
+            </a:extLst>
+          </p:cNvPr>
+          <p:cNvSpPr>
+            <a:spLocks xmlns:a="http://schemas.openxmlformats.org/drawingml/2006/main" noGrp="1"/>
+          </p:cNvSpPr>
+          <p:nvPr/>
+        </p:nvSpPr>
+        <p:spPr>
+          <a:xfrm xmlns:a="http://schemas.openxmlformats.org/drawingml/2006/main">
+            <a:off x="1714500" y="2114550"/>
+            <a:ext cx="9525000" cy="809625"/>
           </a:xfrm>
           <a:prstGeom xmlns:a="http://schemas.openxmlformats.org/drawingml/2006/main" prst="rect">
             <a:avLst/>
@@ -8383,7 +8385,7 @@
           <a:lstStyle xmlns:a="http://schemas.openxmlformats.org/drawingml/2006/main"/>
           <a:p xmlns:a="http://schemas.openxmlformats.org/drawingml/2006/main">
             <a:pPr algn="l">
-              <a:defRPr sz="1500" b="0">
+              <a:defRPr sz="1725" b="0">
                 <a:solidFill>
                   <a:srgbClr val="17253A"/>
                 </a:solidFill>
@@ -8393,7 +8395,7 @@
               </a:defRPr>
             </a:pPr>
             <a:r>
-              <a:rPr sz="1500" b="0">
+              <a:rPr sz="1725" b="0">
                 <a:solidFill>
                   <a:srgbClr val="17253A"/>
                 </a:solidFill>
@@ -8401,7 +8403,7 @@
                 <a:ea typeface="Arial"/>
                 <a:cs typeface="Arial"/>
               </a:rPr>
-              <a:t>Identify the structure: Choose a representation out of 100 or use division.</a:t>
+              <a:t>35%</a:t>
             </a:r>
           </a:p>
         </p:txBody>
@@ -8411,28 +8413,30 @@
           <p:cNvPr id="14" name="">
             <a:extLst xmlns:a="http://schemas.openxmlformats.org/drawingml/2006/main">
               <a:ext uri="{FF2B5EF4-FFF2-40B4-BE49-F238E27FC236}">
-                <a16:creationId xmlns:a16="http://schemas.microsoft.com/office/drawing/2014/main" id="{2D12F085-2A72-45C9-91E5-FDBF88BD6558}"/>
-              </a:ext>
-            </a:extLst>
-          </p:cNvPr>
-          <p:cNvSpPr>
-            <a:spLocks xmlns:a="http://schemas.openxmlformats.org/drawingml/2006/main" noGrp="1"/>
-          </p:cNvSpPr>
-          <p:nvPr/>
-        </p:nvSpPr>
-        <p:spPr>
-          <a:xfrm xmlns:a="http://schemas.openxmlformats.org/drawingml/2006/main">
-            <a:off x="1000125" y="2990850"/>
-            <a:ext cx="476250" cy="476250"/>
-          </a:xfrm>
-          <a:prstGeom xmlns:a="http://schemas.openxmlformats.org/drawingml/2006/main" prst="ellipse">
+                <a16:creationId xmlns:a16="http://schemas.microsoft.com/office/drawing/2014/main" id="{5F9625E6-5359-4E56-990D-74748CF0379B}"/>
+              </a:ext>
+            </a:extLst>
+          </p:cNvPr>
+          <p:cNvSpPr>
+            <a:spLocks xmlns:a="http://schemas.openxmlformats.org/drawingml/2006/main" noGrp="1"/>
+          </p:cNvSpPr>
+          <p:nvPr/>
+        </p:nvSpPr>
+        <p:spPr>
+          <a:xfrm xmlns:a="http://schemas.openxmlformats.org/drawingml/2006/main">
+            <a:off x="1714500" y="2943225"/>
+            <a:ext cx="9334500" cy="9525"/>
+          </a:xfrm>
+          <a:prstGeom xmlns:a="http://schemas.openxmlformats.org/drawingml/2006/main" prst="rect">
             <a:avLst/>
           </a:prstGeom>
           <a:solidFill xmlns:a="http://schemas.openxmlformats.org/drawingml/2006/main">
-            <a:srgbClr val="2C6E73"/>
+            <a:srgbClr val="D9E0E6"/>
           </a:solidFill>
           <a:ln xmlns:a="http://schemas.openxmlformats.org/drawingml/2006/main" w="0">
-            <a:noFill/>
+            <a:solidFill>
+              <a:srgbClr val="D9E0E6"/>
+            </a:solidFill>
           </a:ln>
         </p:spPr>
       </p:sp>
@@ -8441,19 +8445,19 @@
           <p:cNvPr id="15" name="">
             <a:extLst xmlns:a="http://schemas.openxmlformats.org/drawingml/2006/main">
               <a:ext uri="{FF2B5EF4-FFF2-40B4-BE49-F238E27FC236}">
-                <a16:creationId xmlns:a16="http://schemas.microsoft.com/office/drawing/2014/main" id="{4816FD44-9D16-4F5B-B836-3E9420A846A6}"/>
-              </a:ext>
-            </a:extLst>
-          </p:cNvPr>
-          <p:cNvSpPr>
-            <a:spLocks xmlns:a="http://schemas.openxmlformats.org/drawingml/2006/main" noGrp="1"/>
-          </p:cNvSpPr>
-          <p:nvPr/>
-        </p:nvSpPr>
-        <p:spPr>
-          <a:xfrm xmlns:a="http://schemas.openxmlformats.org/drawingml/2006/main">
-            <a:off x="1000125" y="3019425"/>
-            <a:ext cx="476250" cy="419100"/>
+                <a16:creationId xmlns:a16="http://schemas.microsoft.com/office/drawing/2014/main" id="{574408DF-9ED4-4D84-AA46-3CF576AA1E6E}"/>
+              </a:ext>
+            </a:extLst>
+          </p:cNvPr>
+          <p:cNvSpPr>
+            <a:spLocks xmlns:a="http://schemas.openxmlformats.org/drawingml/2006/main" noGrp="1"/>
+          </p:cNvSpPr>
+          <p:nvPr/>
+        </p:nvSpPr>
+        <p:spPr>
+          <a:xfrm xmlns:a="http://schemas.openxmlformats.org/drawingml/2006/main">
+            <a:off x="1162050" y="3076575"/>
+            <a:ext cx="400050" cy="400050"/>
           </a:xfrm>
           <a:prstGeom xmlns:a="http://schemas.openxmlformats.org/drawingml/2006/main" prst="rect">
             <a:avLst/>
@@ -8470,9 +8474,9 @@
           <a:lstStyle xmlns:a="http://schemas.openxmlformats.org/drawingml/2006/main"/>
           <a:p xmlns:a="http://schemas.openxmlformats.org/drawingml/2006/main">
             <a:pPr algn="ctr">
-              <a:defRPr sz="1350" b="1">
-                <a:solidFill>
-                  <a:srgbClr val="FFFFFF"/>
+              <a:defRPr sz="1125" b="1">
+                <a:solidFill>
+                  <a:srgbClr val="2C6E73"/>
                 </a:solidFill>
                 <a:latin typeface="Arial"/>
                 <a:ea typeface="Arial"/>
@@ -8480,9 +8484,9 @@
               </a:defRPr>
             </a:pPr>
             <a:r>
-              <a:rPr sz="1350" b="1">
-                <a:solidFill>
-                  <a:srgbClr val="FFFFFF"/>
+              <a:rPr sz="1125" b="1">
+                <a:solidFill>
+                  <a:srgbClr val="2C6E73"/>
                 </a:solidFill>
                 <a:latin typeface="Arial"/>
                 <a:ea typeface="Arial"/>
@@ -8498,19 +8502,19 @@
           <p:cNvPr id="16" name="">
             <a:extLst xmlns:a="http://schemas.openxmlformats.org/drawingml/2006/main">
               <a:ext uri="{FF2B5EF4-FFF2-40B4-BE49-F238E27FC236}">
-                <a16:creationId xmlns:a16="http://schemas.microsoft.com/office/drawing/2014/main" id="{AF9399BE-ED08-4432-AA7D-87C7228BBB3D}"/>
-              </a:ext>
-            </a:extLst>
-          </p:cNvPr>
-          <p:cNvSpPr>
-            <a:spLocks xmlns:a="http://schemas.openxmlformats.org/drawingml/2006/main" noGrp="1"/>
-          </p:cNvSpPr>
-          <p:nvPr/>
-        </p:nvSpPr>
-        <p:spPr>
-          <a:xfrm xmlns:a="http://schemas.openxmlformats.org/drawingml/2006/main">
-            <a:off x="1714500" y="2924175"/>
-            <a:ext cx="9429750" cy="609600"/>
+                <a16:creationId xmlns:a16="http://schemas.microsoft.com/office/drawing/2014/main" id="{55DE51A2-21AF-4405-98D3-139487CC64C6}"/>
+              </a:ext>
+            </a:extLst>
+          </p:cNvPr>
+          <p:cNvSpPr>
+            <a:spLocks xmlns:a="http://schemas.openxmlformats.org/drawingml/2006/main" noGrp="1"/>
+          </p:cNvSpPr>
+          <p:nvPr/>
+        </p:nvSpPr>
+        <p:spPr>
+          <a:xfrm xmlns:a="http://schemas.openxmlformats.org/drawingml/2006/main">
+            <a:off x="1714500" y="2990850"/>
+            <a:ext cx="9525000" cy="809625"/>
           </a:xfrm>
           <a:prstGeom xmlns:a="http://schemas.openxmlformats.org/drawingml/2006/main" prst="rect">
             <a:avLst/>
@@ -8527,7 +8531,7 @@
           <a:lstStyle xmlns:a="http://schemas.openxmlformats.org/drawingml/2006/main"/>
           <a:p xmlns:a="http://schemas.openxmlformats.org/drawingml/2006/main">
             <a:pPr algn="l">
-              <a:defRPr sz="1500" b="0">
+              <a:defRPr sz="1725" b="0">
                 <a:solidFill>
                   <a:srgbClr val="17253A"/>
                 </a:solidFill>
@@ -8537,7 +8541,7 @@
               </a:defRPr>
             </a:pPr>
             <a:r>
-              <a:rPr sz="1500" b="0">
+              <a:rPr sz="1725" b="0">
                 <a:solidFill>
                   <a:srgbClr val="17253A"/>
                 </a:solidFill>
@@ -8545,7 +8549,7 @@
                 <a:ea typeface="Arial"/>
                 <a:cs typeface="Arial"/>
               </a:rPr>
-              <a:t>Set up the method: Convert carefully while preserving the value.</a:t>
+              <a:t>35% = 35/100</a:t>
             </a:r>
           </a:p>
         </p:txBody>
@@ -8555,28 +8559,30 @@
           <p:cNvPr id="17" name="">
             <a:extLst xmlns:a="http://schemas.openxmlformats.org/drawingml/2006/main">
               <a:ext uri="{FF2B5EF4-FFF2-40B4-BE49-F238E27FC236}">
-                <a16:creationId xmlns:a16="http://schemas.microsoft.com/office/drawing/2014/main" id="{408F56D2-6BC2-412E-84DE-AB24290DE642}"/>
-              </a:ext>
-            </a:extLst>
-          </p:cNvPr>
-          <p:cNvSpPr>
-            <a:spLocks xmlns:a="http://schemas.openxmlformats.org/drawingml/2006/main" noGrp="1"/>
-          </p:cNvSpPr>
-          <p:nvPr/>
-        </p:nvSpPr>
-        <p:spPr>
-          <a:xfrm xmlns:a="http://schemas.openxmlformats.org/drawingml/2006/main">
-            <a:off x="1000125" y="3733800"/>
-            <a:ext cx="476250" cy="476250"/>
-          </a:xfrm>
-          <a:prstGeom xmlns:a="http://schemas.openxmlformats.org/drawingml/2006/main" prst="ellipse">
+                <a16:creationId xmlns:a16="http://schemas.microsoft.com/office/drawing/2014/main" id="{10BC2BDD-C8AE-4C24-8D1D-5C8B30A21A58}"/>
+              </a:ext>
+            </a:extLst>
+          </p:cNvPr>
+          <p:cNvSpPr>
+            <a:spLocks xmlns:a="http://schemas.openxmlformats.org/drawingml/2006/main" noGrp="1"/>
+          </p:cNvSpPr>
+          <p:nvPr/>
+        </p:nvSpPr>
+        <p:spPr>
+          <a:xfrm xmlns:a="http://schemas.openxmlformats.org/drawingml/2006/main">
+            <a:off x="1714500" y="3819525"/>
+            <a:ext cx="9334500" cy="9525"/>
+          </a:xfrm>
+          <a:prstGeom xmlns:a="http://schemas.openxmlformats.org/drawingml/2006/main" prst="rect">
             <a:avLst/>
           </a:prstGeom>
           <a:solidFill xmlns:a="http://schemas.openxmlformats.org/drawingml/2006/main">
-            <a:srgbClr val="2C6E73"/>
+            <a:srgbClr val="D9E0E6"/>
           </a:solidFill>
           <a:ln xmlns:a="http://schemas.openxmlformats.org/drawingml/2006/main" w="0">
-            <a:noFill/>
+            <a:solidFill>
+              <a:srgbClr val="D9E0E6"/>
+            </a:solidFill>
           </a:ln>
         </p:spPr>
       </p:sp>
@@ -8585,19 +8591,19 @@
           <p:cNvPr id="18" name="">
             <a:extLst xmlns:a="http://schemas.openxmlformats.org/drawingml/2006/main">
               <a:ext uri="{FF2B5EF4-FFF2-40B4-BE49-F238E27FC236}">
-                <a16:creationId xmlns:a16="http://schemas.microsoft.com/office/drawing/2014/main" id="{BA021E26-D20B-4633-859E-EE92E0B19235}"/>
-              </a:ext>
-            </a:extLst>
-          </p:cNvPr>
-          <p:cNvSpPr>
-            <a:spLocks xmlns:a="http://schemas.openxmlformats.org/drawingml/2006/main" noGrp="1"/>
-          </p:cNvSpPr>
-          <p:nvPr/>
-        </p:nvSpPr>
-        <p:spPr>
-          <a:xfrm xmlns:a="http://schemas.openxmlformats.org/drawingml/2006/main">
-            <a:off x="1000125" y="3762375"/>
-            <a:ext cx="476250" cy="419100"/>
+                <a16:creationId xmlns:a16="http://schemas.microsoft.com/office/drawing/2014/main" id="{C0DBF9C0-BD4B-4221-9CA7-41A36771BA4C}"/>
+              </a:ext>
+            </a:extLst>
+          </p:cNvPr>
+          <p:cNvSpPr>
+            <a:spLocks xmlns:a="http://schemas.openxmlformats.org/drawingml/2006/main" noGrp="1"/>
+          </p:cNvSpPr>
+          <p:nvPr/>
+        </p:nvSpPr>
+        <p:spPr>
+          <a:xfrm xmlns:a="http://schemas.openxmlformats.org/drawingml/2006/main">
+            <a:off x="1162050" y="3952875"/>
+            <a:ext cx="400050" cy="400050"/>
           </a:xfrm>
           <a:prstGeom xmlns:a="http://schemas.openxmlformats.org/drawingml/2006/main" prst="rect">
             <a:avLst/>
@@ -8614,9 +8620,9 @@
           <a:lstStyle xmlns:a="http://schemas.openxmlformats.org/drawingml/2006/main"/>
           <a:p xmlns:a="http://schemas.openxmlformats.org/drawingml/2006/main">
             <a:pPr algn="ctr">
-              <a:defRPr sz="1350" b="1">
-                <a:solidFill>
-                  <a:srgbClr val="FFFFFF"/>
+              <a:defRPr sz="1125" b="1">
+                <a:solidFill>
+                  <a:srgbClr val="2C6E73"/>
                 </a:solidFill>
                 <a:latin typeface="Arial"/>
                 <a:ea typeface="Arial"/>
@@ -8624,9 +8630,9 @@
               </a:defRPr>
             </a:pPr>
             <a:r>
-              <a:rPr sz="1350" b="1">
-                <a:solidFill>
-                  <a:srgbClr val="FFFFFF"/>
+              <a:rPr sz="1125" b="1">
+                <a:solidFill>
+                  <a:srgbClr val="2C6E73"/>
                 </a:solidFill>
                 <a:latin typeface="Arial"/>
                 <a:ea typeface="Arial"/>
@@ -8642,19 +8648,19 @@
           <p:cNvPr id="19" name="">
             <a:extLst xmlns:a="http://schemas.openxmlformats.org/drawingml/2006/main">
               <a:ext uri="{FF2B5EF4-FFF2-40B4-BE49-F238E27FC236}">
-                <a16:creationId xmlns:a16="http://schemas.microsoft.com/office/drawing/2014/main" id="{C6EA710A-FF86-4E67-BD58-663EE8AF83A2}"/>
-              </a:ext>
-            </a:extLst>
-          </p:cNvPr>
-          <p:cNvSpPr>
-            <a:spLocks xmlns:a="http://schemas.openxmlformats.org/drawingml/2006/main" noGrp="1"/>
-          </p:cNvSpPr>
-          <p:nvPr/>
-        </p:nvSpPr>
-        <p:spPr>
-          <a:xfrm xmlns:a="http://schemas.openxmlformats.org/drawingml/2006/main">
-            <a:off x="1714500" y="3667125"/>
-            <a:ext cx="9429750" cy="609600"/>
+                <a16:creationId xmlns:a16="http://schemas.microsoft.com/office/drawing/2014/main" id="{1A3EFCA0-F068-4DA1-A247-0E836D48591C}"/>
+              </a:ext>
+            </a:extLst>
+          </p:cNvPr>
+          <p:cNvSpPr>
+            <a:spLocks xmlns:a="http://schemas.openxmlformats.org/drawingml/2006/main" noGrp="1"/>
+          </p:cNvSpPr>
+          <p:nvPr/>
+        </p:nvSpPr>
+        <p:spPr>
+          <a:xfrm xmlns:a="http://schemas.openxmlformats.org/drawingml/2006/main">
+            <a:off x="1714500" y="3867150"/>
+            <a:ext cx="9525000" cy="809625"/>
           </a:xfrm>
           <a:prstGeom xmlns:a="http://schemas.openxmlformats.org/drawingml/2006/main" prst="rect">
             <a:avLst/>
@@ -8671,7 +8677,7 @@
           <a:lstStyle xmlns:a="http://schemas.openxmlformats.org/drawingml/2006/main"/>
           <a:p xmlns:a="http://schemas.openxmlformats.org/drawingml/2006/main">
             <a:pPr algn="l">
-              <a:defRPr sz="1500" b="0">
+              <a:defRPr sz="1725" b="0">
                 <a:solidFill>
                   <a:srgbClr val="17253A"/>
                 </a:solidFill>
@@ -8681,7 +8687,7 @@
               </a:defRPr>
             </a:pPr>
             <a:r>
-              <a:rPr sz="1500" b="0">
+              <a:rPr sz="1725" b="0">
                 <a:solidFill>
                   <a:srgbClr val="17253A"/>
                 </a:solidFill>
@@ -8689,7 +8695,7 @@
                 <a:ea typeface="Arial"/>
                 <a:cs typeface="Arial"/>
               </a:rPr>
-              <a:t>Complete the calculation: 7/20.</a:t>
+              <a:t>Divide numerator and denominator by 5</a:t>
             </a:r>
           </a:p>
         </p:txBody>
@@ -8699,28 +8705,30 @@
           <p:cNvPr id="20" name="">
             <a:extLst xmlns:a="http://schemas.openxmlformats.org/drawingml/2006/main">
               <a:ext uri="{FF2B5EF4-FFF2-40B4-BE49-F238E27FC236}">
-                <a16:creationId xmlns:a16="http://schemas.microsoft.com/office/drawing/2014/main" id="{38F2CDD2-D7A0-4048-808D-3D039C3611FA}"/>
-              </a:ext>
-            </a:extLst>
-          </p:cNvPr>
-          <p:cNvSpPr>
-            <a:spLocks xmlns:a="http://schemas.openxmlformats.org/drawingml/2006/main" noGrp="1"/>
-          </p:cNvSpPr>
-          <p:nvPr/>
-        </p:nvSpPr>
-        <p:spPr>
-          <a:xfrm xmlns:a="http://schemas.openxmlformats.org/drawingml/2006/main">
-            <a:off x="1000125" y="4476750"/>
-            <a:ext cx="476250" cy="476250"/>
-          </a:xfrm>
-          <a:prstGeom xmlns:a="http://schemas.openxmlformats.org/drawingml/2006/main" prst="ellipse">
+                <a16:creationId xmlns:a16="http://schemas.microsoft.com/office/drawing/2014/main" id="{6FDDFD89-4B6F-4BAC-98A3-08A0D0AA2BC8}"/>
+              </a:ext>
+            </a:extLst>
+          </p:cNvPr>
+          <p:cNvSpPr>
+            <a:spLocks xmlns:a="http://schemas.openxmlformats.org/drawingml/2006/main" noGrp="1"/>
+          </p:cNvSpPr>
+          <p:nvPr/>
+        </p:nvSpPr>
+        <p:spPr>
+          <a:xfrm xmlns:a="http://schemas.openxmlformats.org/drawingml/2006/main">
+            <a:off x="1714500" y="4695825"/>
+            <a:ext cx="9334500" cy="9525"/>
+          </a:xfrm>
+          <a:prstGeom xmlns:a="http://schemas.openxmlformats.org/drawingml/2006/main" prst="rect">
             <a:avLst/>
           </a:prstGeom>
           <a:solidFill xmlns:a="http://schemas.openxmlformats.org/drawingml/2006/main">
-            <a:srgbClr val="2C6E73"/>
+            <a:srgbClr val="D9E0E6"/>
           </a:solidFill>
           <a:ln xmlns:a="http://schemas.openxmlformats.org/drawingml/2006/main" w="0">
-            <a:noFill/>
+            <a:solidFill>
+              <a:srgbClr val="D9E0E6"/>
+            </a:solidFill>
           </a:ln>
         </p:spPr>
       </p:sp>
@@ -8729,19 +8737,19 @@
           <p:cNvPr id="21" name="">
             <a:extLst xmlns:a="http://schemas.openxmlformats.org/drawingml/2006/main">
               <a:ext uri="{FF2B5EF4-FFF2-40B4-BE49-F238E27FC236}">
-                <a16:creationId xmlns:a16="http://schemas.microsoft.com/office/drawing/2014/main" id="{8CE9D868-FE35-412D-9F46-A9932923FEDC}"/>
-              </a:ext>
-            </a:extLst>
-          </p:cNvPr>
-          <p:cNvSpPr>
-            <a:spLocks xmlns:a="http://schemas.openxmlformats.org/drawingml/2006/main" noGrp="1"/>
-          </p:cNvSpPr>
-          <p:nvPr/>
-        </p:nvSpPr>
-        <p:spPr>
-          <a:xfrm xmlns:a="http://schemas.openxmlformats.org/drawingml/2006/main">
-            <a:off x="1000125" y="4505325"/>
-            <a:ext cx="476250" cy="419100"/>
+                <a16:creationId xmlns:a16="http://schemas.microsoft.com/office/drawing/2014/main" id="{3A5DA8F0-BD85-457A-854F-73BDE95D9CB3}"/>
+              </a:ext>
+            </a:extLst>
+          </p:cNvPr>
+          <p:cNvSpPr>
+            <a:spLocks xmlns:a="http://schemas.openxmlformats.org/drawingml/2006/main" noGrp="1"/>
+          </p:cNvSpPr>
+          <p:nvPr/>
+        </p:nvSpPr>
+        <p:spPr>
+          <a:xfrm xmlns:a="http://schemas.openxmlformats.org/drawingml/2006/main">
+            <a:off x="1162050" y="4829175"/>
+            <a:ext cx="400050" cy="400050"/>
           </a:xfrm>
           <a:prstGeom xmlns:a="http://schemas.openxmlformats.org/drawingml/2006/main" prst="rect">
             <a:avLst/>
@@ -8758,9 +8766,9 @@
           <a:lstStyle xmlns:a="http://schemas.openxmlformats.org/drawingml/2006/main"/>
           <a:p xmlns:a="http://schemas.openxmlformats.org/drawingml/2006/main">
             <a:pPr algn="ctr">
-              <a:defRPr sz="1350" b="1">
-                <a:solidFill>
-                  <a:srgbClr val="FFFFFF"/>
+              <a:defRPr sz="1125" b="1">
+                <a:solidFill>
+                  <a:srgbClr val="2F785D"/>
                 </a:solidFill>
                 <a:latin typeface="Arial"/>
                 <a:ea typeface="Arial"/>
@@ -8768,9 +8776,9 @@
               </a:defRPr>
             </a:pPr>
             <a:r>
-              <a:rPr sz="1350" b="1">
-                <a:solidFill>
-                  <a:srgbClr val="FFFFFF"/>
+              <a:rPr sz="1125" b="1">
+                <a:solidFill>
+                  <a:srgbClr val="2F785D"/>
                 </a:solidFill>
                 <a:latin typeface="Arial"/>
                 <a:ea typeface="Arial"/>
@@ -8786,19 +8794,19 @@
           <p:cNvPr id="22" name="">
             <a:extLst xmlns:a="http://schemas.openxmlformats.org/drawingml/2006/main">
               <a:ext uri="{FF2B5EF4-FFF2-40B4-BE49-F238E27FC236}">
-                <a16:creationId xmlns:a16="http://schemas.microsoft.com/office/drawing/2014/main" id="{A2C7B8B4-E58B-4229-92E8-87BE10DD7515}"/>
-              </a:ext>
-            </a:extLst>
-          </p:cNvPr>
-          <p:cNvSpPr>
-            <a:spLocks xmlns:a="http://schemas.openxmlformats.org/drawingml/2006/main" noGrp="1"/>
-          </p:cNvSpPr>
-          <p:nvPr/>
-        </p:nvSpPr>
-        <p:spPr>
-          <a:xfrm xmlns:a="http://schemas.openxmlformats.org/drawingml/2006/main">
-            <a:off x="1714500" y="4410075"/>
-            <a:ext cx="9429750" cy="609600"/>
+                <a16:creationId xmlns:a16="http://schemas.microsoft.com/office/drawing/2014/main" id="{83176DA0-FF8D-4BE9-92E5-2A6FD3634E1D}"/>
+              </a:ext>
+            </a:extLst>
+          </p:cNvPr>
+          <p:cNvSpPr>
+            <a:spLocks xmlns:a="http://schemas.openxmlformats.org/drawingml/2006/main" noGrp="1"/>
+          </p:cNvSpPr>
+          <p:nvPr/>
+        </p:nvSpPr>
+        <p:spPr>
+          <a:xfrm xmlns:a="http://schemas.openxmlformats.org/drawingml/2006/main">
+            <a:off x="1714500" y="4743450"/>
+            <a:ext cx="9525000" cy="809625"/>
           </a:xfrm>
           <a:prstGeom xmlns:a="http://schemas.openxmlformats.org/drawingml/2006/main" prst="rect">
             <a:avLst/>
@@ -8815,7 +8823,7 @@
           <a:lstStyle xmlns:a="http://schemas.openxmlformats.org/drawingml/2006/main"/>
           <a:p xmlns:a="http://schemas.openxmlformats.org/drawingml/2006/main">
             <a:pPr algn="l">
-              <a:defRPr sz="1500" b="1">
+              <a:defRPr sz="1725" b="1">
                 <a:solidFill>
                   <a:srgbClr val="2F785D"/>
                 </a:solidFill>
@@ -8825,7 +8833,7 @@
               </a:defRPr>
             </a:pPr>
             <a:r>
-              <a:rPr sz="1500" b="1">
+              <a:rPr sz="1725" b="1">
                 <a:solidFill>
                   <a:srgbClr val="2F785D"/>
                 </a:solidFill>
@@ -8833,7 +8841,7 @@
                 <a:ea typeface="Arial"/>
                 <a:cs typeface="Arial"/>
               </a:rPr>
-              <a:t>Check the result: Check the three forms against a benchmark such as one half.</a:t>
+              <a:t>35/100 = 7/20</a:t>
             </a:r>
           </a:p>
         </p:txBody>
@@ -8841,7 +8849,7 @@
     </p:spTree>
     <p:extLst>
       <p:ext uri="{BB962C8B-B14F-4D97-AF65-F5344CB8AC3E}">
-        <p14:creationId xmlns:p14="http://schemas.microsoft.com/office/powerpoint/2010/main" val="1581135051"/>
+        <p14:creationId xmlns:p14="http://schemas.microsoft.com/office/powerpoint/2010/main" val="969889412"/>
       </p:ext>
     </p:extLst>
   </p:cSld>
@@ -9134,7 +9142,7 @@
           <p:cNvPr id="15" name="">
             <a:extLst xmlns:a="http://schemas.openxmlformats.org/drawingml/2006/main">
               <a:ext uri="{FF2B5EF4-FFF2-40B4-BE49-F238E27FC236}">
-                <a16:creationId xmlns:a16="http://schemas.microsoft.com/office/drawing/2014/main" id="{77DB5E2B-12B0-4245-B968-F71FC3D9D68F}"/>
+                <a16:creationId xmlns:a16="http://schemas.microsoft.com/office/drawing/2014/main" id="{78CB6A89-762E-43B2-8A7F-8ACF45F3112B}"/>
               </a:ext>
             </a:extLst>
           </p:cNvPr>
@@ -9166,7 +9174,7 @@
           <p:cNvPr id="2" name="">
             <a:extLst xmlns:a="http://schemas.openxmlformats.org/drawingml/2006/main">
               <a:ext uri="{FF2B5EF4-FFF2-40B4-BE49-F238E27FC236}">
-                <a16:creationId xmlns:a16="http://schemas.microsoft.com/office/drawing/2014/main" id="{CD8030EC-804F-4949-9E06-FEC27FE58AE0}"/>
+                <a16:creationId xmlns:a16="http://schemas.microsoft.com/office/drawing/2014/main" id="{7C7CC53B-627F-42FF-97F2-EDAFB6E1FDD4}"/>
               </a:ext>
             </a:extLst>
           </p:cNvPr>
@@ -9223,7 +9231,7 @@
           <p:cNvPr id="3" name="">
             <a:extLst xmlns:a="http://schemas.openxmlformats.org/drawingml/2006/main">
               <a:ext uri="{FF2B5EF4-FFF2-40B4-BE49-F238E27FC236}">
-                <a16:creationId xmlns:a16="http://schemas.microsoft.com/office/drawing/2014/main" id="{60D3E468-EDDA-451D-9A16-322AA33288B4}"/>
+                <a16:creationId xmlns:a16="http://schemas.microsoft.com/office/drawing/2014/main" id="{0D604456-5A16-4A07-B489-CE2975D0B3A7}"/>
               </a:ext>
             </a:extLst>
           </p:cNvPr>
@@ -9255,7 +9263,7 @@
           <p:cNvPr id="4" name="">
             <a:extLst xmlns:a="http://schemas.openxmlformats.org/drawingml/2006/main">
               <a:ext uri="{FF2B5EF4-FFF2-40B4-BE49-F238E27FC236}">
-                <a16:creationId xmlns:a16="http://schemas.microsoft.com/office/drawing/2014/main" id="{91E50C30-2123-4B46-A1A3-E725595A5E70}"/>
+                <a16:creationId xmlns:a16="http://schemas.microsoft.com/office/drawing/2014/main" id="{3B277664-DCC9-4C66-B821-4800CBBFCDA1}"/>
               </a:ext>
             </a:extLst>
           </p:cNvPr>
@@ -9312,7 +9320,7 @@
           <p:cNvPr id="5" name="">
             <a:extLst xmlns:a="http://schemas.openxmlformats.org/drawingml/2006/main">
               <a:ext uri="{FF2B5EF4-FFF2-40B4-BE49-F238E27FC236}">
-                <a16:creationId xmlns:a16="http://schemas.microsoft.com/office/drawing/2014/main" id="{4FF6891D-9AF3-4F7F-B875-C6D76843A693}"/>
+                <a16:creationId xmlns:a16="http://schemas.microsoft.com/office/drawing/2014/main" id="{DCACCEFA-E060-4C40-AB4B-8D835D3955CF}"/>
               </a:ext>
             </a:extLst>
           </p:cNvPr>
@@ -9369,7 +9377,7 @@
           <p:cNvPr id="6" name="">
             <a:extLst xmlns:a="http://schemas.openxmlformats.org/drawingml/2006/main">
               <a:ext uri="{FF2B5EF4-FFF2-40B4-BE49-F238E27FC236}">
-                <a16:creationId xmlns:a16="http://schemas.microsoft.com/office/drawing/2014/main" id="{4D65B97F-376C-48AA-AD96-40C9118781BC}"/>
+                <a16:creationId xmlns:a16="http://schemas.microsoft.com/office/drawing/2014/main" id="{8498AD27-1A40-4F40-B010-53747E5BD5F0}"/>
               </a:ext>
             </a:extLst>
           </p:cNvPr>
@@ -9426,7 +9434,7 @@
           <p:cNvPr id="7" name="">
             <a:extLst xmlns:a="http://schemas.openxmlformats.org/drawingml/2006/main">
               <a:ext uri="{FF2B5EF4-FFF2-40B4-BE49-F238E27FC236}">
-                <a16:creationId xmlns:a16="http://schemas.microsoft.com/office/drawing/2014/main" id="{BCF8F52D-6C5D-4E6B-9517-2C821A23026C}"/>
+                <a16:creationId xmlns:a16="http://schemas.microsoft.com/office/drawing/2014/main" id="{9F1F8AA6-848C-4100-87B6-BD5A1B51EB69}"/>
               </a:ext>
             </a:extLst>
           </p:cNvPr>
@@ -9458,7 +9466,7 @@
           <p:cNvPr id="8" name="">
             <a:extLst xmlns:a="http://schemas.openxmlformats.org/drawingml/2006/main">
               <a:ext uri="{FF2B5EF4-FFF2-40B4-BE49-F238E27FC236}">
-                <a16:creationId xmlns:a16="http://schemas.microsoft.com/office/drawing/2014/main" id="{2150EB5C-DF60-4A19-9996-A0239AB71456}"/>
+                <a16:creationId xmlns:a16="http://schemas.microsoft.com/office/drawing/2014/main" id="{3B9EC0B7-CFE8-488B-BB9B-FCA12D8D3E49}"/>
               </a:ext>
             </a:extLst>
           </p:cNvPr>
@@ -9515,7 +9523,7 @@
           <p:cNvPr id="9" name="">
             <a:extLst xmlns:a="http://schemas.openxmlformats.org/drawingml/2006/main">
               <a:ext uri="{FF2B5EF4-FFF2-40B4-BE49-F238E27FC236}">
-                <a16:creationId xmlns:a16="http://schemas.microsoft.com/office/drawing/2014/main" id="{A49AA87B-6A6D-4B82-82CD-18AEB3412D59}"/>
+                <a16:creationId xmlns:a16="http://schemas.microsoft.com/office/drawing/2014/main" id="{D3063FE5-5983-498F-84CF-A6290B4FBAA5}"/>
               </a:ext>
             </a:extLst>
           </p:cNvPr>
@@ -9572,7 +9580,7 @@
           <p:cNvPr id="10" name="">
             <a:extLst xmlns:a="http://schemas.openxmlformats.org/drawingml/2006/main">
               <a:ext uri="{FF2B5EF4-FFF2-40B4-BE49-F238E27FC236}">
-                <a16:creationId xmlns:a16="http://schemas.microsoft.com/office/drawing/2014/main" id="{4ACEE6B3-3989-4562-A4C3-5CBCDFA7BEED}"/>
+                <a16:creationId xmlns:a16="http://schemas.microsoft.com/office/drawing/2014/main" id="{32D6F7A9-6E27-4D34-AE89-CDE469AD443E}"/>
               </a:ext>
             </a:extLst>
           </p:cNvPr>
@@ -9629,7 +9637,7 @@
           <p:cNvPr id="11" name="">
             <a:extLst xmlns:a="http://schemas.openxmlformats.org/drawingml/2006/main">
               <a:ext uri="{FF2B5EF4-FFF2-40B4-BE49-F238E27FC236}">
-                <a16:creationId xmlns:a16="http://schemas.microsoft.com/office/drawing/2014/main" id="{BF56ADC5-9BCE-46F2-9CB0-CF6507FC1F76}"/>
+                <a16:creationId xmlns:a16="http://schemas.microsoft.com/office/drawing/2014/main" id="{4B631160-ACE7-48FC-B832-4C9046BA0CE7}"/>
               </a:ext>
             </a:extLst>
           </p:cNvPr>
@@ -9686,7 +9694,7 @@
           <p:cNvPr id="12" name="">
             <a:extLst xmlns:a="http://schemas.openxmlformats.org/drawingml/2006/main">
               <a:ext uri="{FF2B5EF4-FFF2-40B4-BE49-F238E27FC236}">
-                <a16:creationId xmlns:a16="http://schemas.microsoft.com/office/drawing/2014/main" id="{9E551D57-A165-4385-8BF5-C72684CA475D}"/>
+                <a16:creationId xmlns:a16="http://schemas.microsoft.com/office/drawing/2014/main" id="{84C5A622-6DDA-4F96-8D78-F12E947E4E5A}"/>
               </a:ext>
             </a:extLst>
           </p:cNvPr>
@@ -9718,7 +9726,7 @@
           <p:cNvPr id="13" name="">
             <a:extLst xmlns:a="http://schemas.openxmlformats.org/drawingml/2006/main">
               <a:ext uri="{FF2B5EF4-FFF2-40B4-BE49-F238E27FC236}">
-                <a16:creationId xmlns:a16="http://schemas.microsoft.com/office/drawing/2014/main" id="{AEF2903B-F237-4466-9E2B-478D47949D49}"/>
+                <a16:creationId xmlns:a16="http://schemas.microsoft.com/office/drawing/2014/main" id="{8322663F-76AC-416E-98B6-C7436DEBC4B3}"/>
               </a:ext>
             </a:extLst>
           </p:cNvPr>
@@ -9775,7 +9783,7 @@
           <p:cNvPr id="14" name="">
             <a:extLst xmlns:a="http://schemas.openxmlformats.org/drawingml/2006/main">
               <a:ext uri="{FF2B5EF4-FFF2-40B4-BE49-F238E27FC236}">
-                <a16:creationId xmlns:a16="http://schemas.microsoft.com/office/drawing/2014/main" id="{C3B3CEEC-E87A-44D3-9CBF-D56764AAC021}"/>
+                <a16:creationId xmlns:a16="http://schemas.microsoft.com/office/drawing/2014/main" id="{503740B7-F9E8-4333-9C03-84656E7B489A}"/>
               </a:ext>
             </a:extLst>
           </p:cNvPr>
@@ -9830,7 +9838,7 @@
     </p:spTree>
     <p:extLst>
       <p:ext uri="{BB962C8B-B14F-4D97-AF65-F5344CB8AC3E}">
-        <p14:creationId xmlns:p14="http://schemas.microsoft.com/office/powerpoint/2010/main" val="288913965"/>
+        <p14:creationId xmlns:p14="http://schemas.microsoft.com/office/powerpoint/2010/main" val="2142119254"/>
       </p:ext>
     </p:extLst>
   </p:cSld>
@@ -10031,7 +10039,7 @@
           <p:cNvPr id="16" name="">
             <a:extLst xmlns:a="http://schemas.openxmlformats.org/drawingml/2006/main">
               <a:ext uri="{FF2B5EF4-FFF2-40B4-BE49-F238E27FC236}">
-                <a16:creationId xmlns:a16="http://schemas.microsoft.com/office/drawing/2014/main" id="{3ED68DC9-F42E-408D-B1FD-74EAB3E26ACD}"/>
+                <a16:creationId xmlns:a16="http://schemas.microsoft.com/office/drawing/2014/main" id="{2DF592CC-F262-4662-A2EB-5B9AEE18C6CC}"/>
               </a:ext>
             </a:extLst>
           </p:cNvPr>
@@ -10063,7 +10071,7 @@
           <p:cNvPr id="2" name="">
             <a:extLst xmlns:a="http://schemas.openxmlformats.org/drawingml/2006/main">
               <a:ext uri="{FF2B5EF4-FFF2-40B4-BE49-F238E27FC236}">
-                <a16:creationId xmlns:a16="http://schemas.microsoft.com/office/drawing/2014/main" id="{F3F2EA05-5692-4BCC-A27D-4A2A7FAB11CC}"/>
+                <a16:creationId xmlns:a16="http://schemas.microsoft.com/office/drawing/2014/main" id="{9AC4F613-FD97-4295-82A4-6D220EDC7697}"/>
               </a:ext>
             </a:extLst>
           </p:cNvPr>
@@ -10120,7 +10128,7 @@
           <p:cNvPr id="3" name="">
             <a:extLst xmlns:a="http://schemas.openxmlformats.org/drawingml/2006/main">
               <a:ext uri="{FF2B5EF4-FFF2-40B4-BE49-F238E27FC236}">
-                <a16:creationId xmlns:a16="http://schemas.microsoft.com/office/drawing/2014/main" id="{3FD5EF47-3C0F-47D0-BB75-4C9423D8E513}"/>
+                <a16:creationId xmlns:a16="http://schemas.microsoft.com/office/drawing/2014/main" id="{3FE89E2B-AA89-44E8-BE29-42E50D882BBC}"/>
               </a:ext>
             </a:extLst>
           </p:cNvPr>
@@ -10152,7 +10160,7 @@
           <p:cNvPr id="4" name="">
             <a:extLst xmlns:a="http://schemas.openxmlformats.org/drawingml/2006/main">
               <a:ext uri="{FF2B5EF4-FFF2-40B4-BE49-F238E27FC236}">
-                <a16:creationId xmlns:a16="http://schemas.microsoft.com/office/drawing/2014/main" id="{B5F36A46-9B00-402F-AB8C-15AEA64B0CCF}"/>
+                <a16:creationId xmlns:a16="http://schemas.microsoft.com/office/drawing/2014/main" id="{5B209878-7ECE-4C38-BC3B-306986598A43}"/>
               </a:ext>
             </a:extLst>
           </p:cNvPr>
@@ -10209,7 +10217,7 @@
           <p:cNvPr id="5" name="">
             <a:extLst xmlns:a="http://schemas.openxmlformats.org/drawingml/2006/main">
               <a:ext uri="{FF2B5EF4-FFF2-40B4-BE49-F238E27FC236}">
-                <a16:creationId xmlns:a16="http://schemas.microsoft.com/office/drawing/2014/main" id="{647D08D3-7EA3-4856-B7AB-0C35D9E1DD37}"/>
+                <a16:creationId xmlns:a16="http://schemas.microsoft.com/office/drawing/2014/main" id="{6E4371C7-4A99-4C48-B0B9-398CA230A795}"/>
               </a:ext>
             </a:extLst>
           </p:cNvPr>
@@ -10266,7 +10274,7 @@
           <p:cNvPr id="6" name="">
             <a:extLst xmlns:a="http://schemas.openxmlformats.org/drawingml/2006/main">
               <a:ext uri="{FF2B5EF4-FFF2-40B4-BE49-F238E27FC236}">
-                <a16:creationId xmlns:a16="http://schemas.microsoft.com/office/drawing/2014/main" id="{8F1F0CE2-CCE1-45A6-8A05-E8BE28D188A2}"/>
+                <a16:creationId xmlns:a16="http://schemas.microsoft.com/office/drawing/2014/main" id="{3D67E9A0-F181-47C9-A216-EA0F631F9468}"/>
               </a:ext>
             </a:extLst>
           </p:cNvPr>
@@ -10323,7 +10331,7 @@
           <p:cNvPr id="7" name="">
             <a:extLst xmlns:a="http://schemas.openxmlformats.org/drawingml/2006/main">
               <a:ext uri="{FF2B5EF4-FFF2-40B4-BE49-F238E27FC236}">
-                <a16:creationId xmlns:a16="http://schemas.microsoft.com/office/drawing/2014/main" id="{83426933-21F5-45D8-8E3C-5F1BFB8C89C4}"/>
+                <a16:creationId xmlns:a16="http://schemas.microsoft.com/office/drawing/2014/main" id="{D3401DC7-AB9B-4916-AFA2-86A09FB24EF8}"/>
               </a:ext>
             </a:extLst>
           </p:cNvPr>
@@ -10355,7 +10363,7 @@
           <p:cNvPr id="8" name="">
             <a:extLst xmlns:a="http://schemas.openxmlformats.org/drawingml/2006/main">
               <a:ext uri="{FF2B5EF4-FFF2-40B4-BE49-F238E27FC236}">
-                <a16:creationId xmlns:a16="http://schemas.microsoft.com/office/drawing/2014/main" id="{0E88B33F-7155-4BE4-949B-86EAC5923A8C}"/>
+                <a16:creationId xmlns:a16="http://schemas.microsoft.com/office/drawing/2014/main" id="{DCCBFADF-F2B1-4047-80B0-2FD0FCC57018}"/>
               </a:ext>
             </a:extLst>
           </p:cNvPr>
@@ -10412,7 +10420,7 @@
           <p:cNvPr id="9" name="">
             <a:extLst xmlns:a="http://schemas.openxmlformats.org/drawingml/2006/main">
               <a:ext uri="{FF2B5EF4-FFF2-40B4-BE49-F238E27FC236}">
-                <a16:creationId xmlns:a16="http://schemas.microsoft.com/office/drawing/2014/main" id="{4F376902-D4E2-4887-97C2-C9CC494063A5}"/>
+                <a16:creationId xmlns:a16="http://schemas.microsoft.com/office/drawing/2014/main" id="{C01FACE4-CB72-4B02-9DBB-047DB534F071}"/>
               </a:ext>
             </a:extLst>
           </p:cNvPr>
@@ -10469,7 +10477,7 @@
           <p:cNvPr id="10" name="">
             <a:extLst xmlns:a="http://schemas.openxmlformats.org/drawingml/2006/main">
               <a:ext uri="{FF2B5EF4-FFF2-40B4-BE49-F238E27FC236}">
-                <a16:creationId xmlns:a16="http://schemas.microsoft.com/office/drawing/2014/main" id="{BB694DF0-BB51-40C9-96AD-25155DE724A8}"/>
+                <a16:creationId xmlns:a16="http://schemas.microsoft.com/office/drawing/2014/main" id="{B4C8870A-81B8-421F-9BA8-D0E834233E3E}"/>
               </a:ext>
             </a:extLst>
           </p:cNvPr>
@@ -10526,7 +10534,7 @@
           <p:cNvPr id="11" name="">
             <a:extLst xmlns:a="http://schemas.openxmlformats.org/drawingml/2006/main">
               <a:ext uri="{FF2B5EF4-FFF2-40B4-BE49-F238E27FC236}">
-                <a16:creationId xmlns:a16="http://schemas.microsoft.com/office/drawing/2014/main" id="{ED87D120-59DE-4912-9E68-ABCB7CD1AAB7}"/>
+                <a16:creationId xmlns:a16="http://schemas.microsoft.com/office/drawing/2014/main" id="{33735681-D786-4F97-BCA1-D446544FAA44}"/>
               </a:ext>
             </a:extLst>
           </p:cNvPr>
@@ -10583,7 +10591,7 @@
           <p:cNvPr id="12" name="">
             <a:extLst xmlns:a="http://schemas.openxmlformats.org/drawingml/2006/main">
               <a:ext uri="{FF2B5EF4-FFF2-40B4-BE49-F238E27FC236}">
-                <a16:creationId xmlns:a16="http://schemas.microsoft.com/office/drawing/2014/main" id="{51020EB5-A5AA-4792-93AA-89A31DB41479}"/>
+                <a16:creationId xmlns:a16="http://schemas.microsoft.com/office/drawing/2014/main" id="{7753320A-2CB8-4413-ACF5-95415009D829}"/>
               </a:ext>
             </a:extLst>
           </p:cNvPr>
@@ -10640,7 +10648,7 @@
           <p:cNvPr id="13" name="">
             <a:extLst xmlns:a="http://schemas.openxmlformats.org/drawingml/2006/main">
               <a:ext uri="{FF2B5EF4-FFF2-40B4-BE49-F238E27FC236}">
-                <a16:creationId xmlns:a16="http://schemas.microsoft.com/office/drawing/2014/main" id="{E358551F-9F06-4A7D-9551-0BA9AD902C96}"/>
+                <a16:creationId xmlns:a16="http://schemas.microsoft.com/office/drawing/2014/main" id="{B6483D73-2823-46B1-BDFA-23CF3C13215E}"/>
               </a:ext>
             </a:extLst>
           </p:cNvPr>
@@ -10697,7 +10705,7 @@
           <p:cNvPr id="14" name="">
             <a:extLst xmlns:a="http://schemas.openxmlformats.org/drawingml/2006/main">
               <a:ext uri="{FF2B5EF4-FFF2-40B4-BE49-F238E27FC236}">
-                <a16:creationId xmlns:a16="http://schemas.microsoft.com/office/drawing/2014/main" id="{595D4A2E-8683-4CB5-AD0B-49450FE8C65A}"/>
+                <a16:creationId xmlns:a16="http://schemas.microsoft.com/office/drawing/2014/main" id="{A820EE94-0DF9-4361-A2BD-16A28E354C4B}"/>
               </a:ext>
             </a:extLst>
           </p:cNvPr>
@@ -10754,7 +10762,7 @@
           <p:cNvPr id="15" name="">
             <a:extLst xmlns:a="http://schemas.openxmlformats.org/drawingml/2006/main">
               <a:ext uri="{FF2B5EF4-FFF2-40B4-BE49-F238E27FC236}">
-                <a16:creationId xmlns:a16="http://schemas.microsoft.com/office/drawing/2014/main" id="{742FA985-54CA-43F7-8E59-AA89163D46EF}"/>
+                <a16:creationId xmlns:a16="http://schemas.microsoft.com/office/drawing/2014/main" id="{904ED3AD-E8C8-461A-B1F6-0E1DF06C203D}"/>
               </a:ext>
             </a:extLst>
           </p:cNvPr>
@@ -10809,7 +10817,7 @@
     </p:spTree>
     <p:extLst>
       <p:ext uri="{BB962C8B-B14F-4D97-AF65-F5344CB8AC3E}">
-        <p14:creationId xmlns:p14="http://schemas.microsoft.com/office/powerpoint/2010/main" val="358265780"/>
+        <p14:creationId xmlns:p14="http://schemas.microsoft.com/office/powerpoint/2010/main" val="1141704196"/>
       </p:ext>
     </p:extLst>
   </p:cSld>
@@ -10964,7 +10972,7 @@
           <p:cNvPr id="16" name="">
             <a:extLst xmlns:a="http://schemas.openxmlformats.org/drawingml/2006/main">
               <a:ext uri="{FF2B5EF4-FFF2-40B4-BE49-F238E27FC236}">
-                <a16:creationId xmlns:a16="http://schemas.microsoft.com/office/drawing/2014/main" id="{0AF577DD-C93C-4E02-80E1-0128DA5A0F88}"/>
+                <a16:creationId xmlns:a16="http://schemas.microsoft.com/office/drawing/2014/main" id="{83D4AD9A-7673-4C06-A71A-F09A11B70E94}"/>
               </a:ext>
             </a:extLst>
           </p:cNvPr>
@@ -10996,7 +11004,7 @@
           <p:cNvPr id="2" name="">
             <a:extLst xmlns:a="http://schemas.openxmlformats.org/drawingml/2006/main">
               <a:ext uri="{FF2B5EF4-FFF2-40B4-BE49-F238E27FC236}">
-                <a16:creationId xmlns:a16="http://schemas.microsoft.com/office/drawing/2014/main" id="{89EEF8C7-8A5B-400F-8BBB-E89B74D1FD0D}"/>
+                <a16:creationId xmlns:a16="http://schemas.microsoft.com/office/drawing/2014/main" id="{A882CAE9-0109-498F-9946-C28CDE3B1514}"/>
               </a:ext>
             </a:extLst>
           </p:cNvPr>
@@ -11053,7 +11061,7 @@
           <p:cNvPr id="3" name="">
             <a:extLst xmlns:a="http://schemas.openxmlformats.org/drawingml/2006/main">
               <a:ext uri="{FF2B5EF4-FFF2-40B4-BE49-F238E27FC236}">
-                <a16:creationId xmlns:a16="http://schemas.microsoft.com/office/drawing/2014/main" id="{288BC4CE-7A07-4620-9AE3-AB6C689B0D83}"/>
+                <a16:creationId xmlns:a16="http://schemas.microsoft.com/office/drawing/2014/main" id="{EAB007D3-ED17-49B3-9BAD-70E3933234F8}"/>
               </a:ext>
             </a:extLst>
           </p:cNvPr>
@@ -11085,7 +11093,7 @@
           <p:cNvPr id="4" name="">
             <a:extLst xmlns:a="http://schemas.openxmlformats.org/drawingml/2006/main">
               <a:ext uri="{FF2B5EF4-FFF2-40B4-BE49-F238E27FC236}">
-                <a16:creationId xmlns:a16="http://schemas.microsoft.com/office/drawing/2014/main" id="{CA0C2815-D616-49D5-9576-14792A00973E}"/>
+                <a16:creationId xmlns:a16="http://schemas.microsoft.com/office/drawing/2014/main" id="{FE31F430-13FF-4146-A8F8-3F97D32A6060}"/>
               </a:ext>
             </a:extLst>
           </p:cNvPr>
@@ -11142,7 +11150,7 @@
           <p:cNvPr id="5" name="">
             <a:extLst xmlns:a="http://schemas.openxmlformats.org/drawingml/2006/main">
               <a:ext uri="{FF2B5EF4-FFF2-40B4-BE49-F238E27FC236}">
-                <a16:creationId xmlns:a16="http://schemas.microsoft.com/office/drawing/2014/main" id="{A9249744-4AB5-4DA9-8E1B-CBACC4B57CCE}"/>
+                <a16:creationId xmlns:a16="http://schemas.microsoft.com/office/drawing/2014/main" id="{A1B6A751-2384-4735-9087-1C1499483F11}"/>
               </a:ext>
             </a:extLst>
           </p:cNvPr>
@@ -11199,7 +11207,7 @@
           <p:cNvPr id="6" name="">
             <a:extLst xmlns:a="http://schemas.openxmlformats.org/drawingml/2006/main">
               <a:ext uri="{FF2B5EF4-FFF2-40B4-BE49-F238E27FC236}">
-                <a16:creationId xmlns:a16="http://schemas.microsoft.com/office/drawing/2014/main" id="{8A036A6E-B424-4323-BA13-D8416175EBDD}"/>
+                <a16:creationId xmlns:a16="http://schemas.microsoft.com/office/drawing/2014/main" id="{12834457-3A06-42EC-99FB-43CBFDB00B95}"/>
               </a:ext>
             </a:extLst>
           </p:cNvPr>
@@ -11256,7 +11264,7 @@
           <p:cNvPr id="7" name="">
             <a:extLst xmlns:a="http://schemas.openxmlformats.org/drawingml/2006/main">
               <a:ext uri="{FF2B5EF4-FFF2-40B4-BE49-F238E27FC236}">
-                <a16:creationId xmlns:a16="http://schemas.microsoft.com/office/drawing/2014/main" id="{5014742A-3E11-4C0E-84B2-5FCC12D9AAB5}"/>
+                <a16:creationId xmlns:a16="http://schemas.microsoft.com/office/drawing/2014/main" id="{2BAD1FF4-6D60-4674-A6BE-9C613EF1134D}"/>
               </a:ext>
             </a:extLst>
           </p:cNvPr>
@@ -11288,7 +11296,7 @@
           <p:cNvPr id="8" name="">
             <a:extLst xmlns:a="http://schemas.openxmlformats.org/drawingml/2006/main">
               <a:ext uri="{FF2B5EF4-FFF2-40B4-BE49-F238E27FC236}">
-                <a16:creationId xmlns:a16="http://schemas.microsoft.com/office/drawing/2014/main" id="{568DCD5B-B980-4094-8C1B-FF47B6BF83CC}"/>
+                <a16:creationId xmlns:a16="http://schemas.microsoft.com/office/drawing/2014/main" id="{7D49DD22-31C6-4484-A92B-C09FD2A3245B}"/>
               </a:ext>
             </a:extLst>
           </p:cNvPr>
@@ -11345,7 +11353,7 @@
           <p:cNvPr id="9" name="">
             <a:extLst xmlns:a="http://schemas.openxmlformats.org/drawingml/2006/main">
               <a:ext uri="{FF2B5EF4-FFF2-40B4-BE49-F238E27FC236}">
-                <a16:creationId xmlns:a16="http://schemas.microsoft.com/office/drawing/2014/main" id="{8FBC6BCD-7175-434C-9105-E82B50A74AEA}"/>
+                <a16:creationId xmlns:a16="http://schemas.microsoft.com/office/drawing/2014/main" id="{0271C42C-C251-4035-9920-D247CBB7004E}"/>
               </a:ext>
             </a:extLst>
           </p:cNvPr>
@@ -11406,7 +11414,7 @@
           <p:nvPr/>
         </p:nvPicPr>
         <p:blipFill>
-          <a:blip xmlns:r="http://schemas.openxmlformats.org/officeDocument/2006/relationships" xmlns:a="http://schemas.openxmlformats.org/drawingml/2006/main" r:embed="Rf2599ede4eb44c88"/>
+          <a:blip xmlns:r="http://schemas.openxmlformats.org/officeDocument/2006/relationships" xmlns:a="http://schemas.openxmlformats.org/drawingml/2006/main" r:embed="Rcec8a34591294547"/>
           <a:stretch xmlns:a="http://schemas.openxmlformats.org/drawingml/2006/main"/>
         </p:blipFill>
         <p:spPr>
@@ -11424,7 +11432,7 @@
           <p:cNvPr id="11" name="">
             <a:extLst xmlns:a="http://schemas.openxmlformats.org/drawingml/2006/main">
               <a:ext uri="{FF2B5EF4-FFF2-40B4-BE49-F238E27FC236}">
-                <a16:creationId xmlns:a16="http://schemas.microsoft.com/office/drawing/2014/main" id="{CA3CE159-10FF-4E86-B349-4901EE4FD2D9}"/>
+                <a16:creationId xmlns:a16="http://schemas.microsoft.com/office/drawing/2014/main" id="{1803EE67-ED1F-4B14-9B11-FC94F1B13576}"/>
               </a:ext>
             </a:extLst>
           </p:cNvPr>
@@ -11481,7 +11489,7 @@
           <p:cNvPr id="12" name="">
             <a:extLst xmlns:a="http://schemas.openxmlformats.org/drawingml/2006/main">
               <a:ext uri="{FF2B5EF4-FFF2-40B4-BE49-F238E27FC236}">
-                <a16:creationId xmlns:a16="http://schemas.microsoft.com/office/drawing/2014/main" id="{90C3088F-F102-45C9-ACC6-38E6B7290586}"/>
+                <a16:creationId xmlns:a16="http://schemas.microsoft.com/office/drawing/2014/main" id="{DD62C34C-022A-4967-B8D8-6460BC9879F8}"/>
               </a:ext>
             </a:extLst>
           </p:cNvPr>
@@ -11538,7 +11546,7 @@
           <p:cNvPr id="13" name="">
             <a:extLst xmlns:a="http://schemas.openxmlformats.org/drawingml/2006/main">
               <a:ext uri="{FF2B5EF4-FFF2-40B4-BE49-F238E27FC236}">
-                <a16:creationId xmlns:a16="http://schemas.microsoft.com/office/drawing/2014/main" id="{A5F252DB-1597-47F4-938B-2CDBE9B09CCE}"/>
+                <a16:creationId xmlns:a16="http://schemas.microsoft.com/office/drawing/2014/main" id="{01135639-7E53-43DD-BAAB-C416182402F0}"/>
               </a:ext>
             </a:extLst>
           </p:cNvPr>
@@ -11570,7 +11578,7 @@
           <p:cNvPr id="14" name="">
             <a:extLst xmlns:a="http://schemas.openxmlformats.org/drawingml/2006/main">
               <a:ext uri="{FF2B5EF4-FFF2-40B4-BE49-F238E27FC236}">
-                <a16:creationId xmlns:a16="http://schemas.microsoft.com/office/drawing/2014/main" id="{2E89884A-118F-48A6-80E9-551F0BCB4E0A}"/>
+                <a16:creationId xmlns:a16="http://schemas.microsoft.com/office/drawing/2014/main" id="{278730EB-1B67-42A4-AFBF-2F1EC625A913}"/>
               </a:ext>
             </a:extLst>
           </p:cNvPr>
@@ -11627,7 +11635,7 @@
           <p:cNvPr id="15" name="">
             <a:extLst xmlns:a="http://schemas.openxmlformats.org/drawingml/2006/main">
               <a:ext uri="{FF2B5EF4-FFF2-40B4-BE49-F238E27FC236}">
-                <a16:creationId xmlns:a16="http://schemas.microsoft.com/office/drawing/2014/main" id="{B8AC2E2E-CA7C-4898-8549-2F4A043DE47B}"/>
+                <a16:creationId xmlns:a16="http://schemas.microsoft.com/office/drawing/2014/main" id="{AC838815-FB86-4CE7-BAB3-E14D716BC0E8}"/>
               </a:ext>
             </a:extLst>
           </p:cNvPr>
@@ -11682,7 +11690,7 @@
     </p:spTree>
     <p:extLst>
       <p:ext uri="{BB962C8B-B14F-4D97-AF65-F5344CB8AC3E}">
-        <p14:creationId xmlns:p14="http://schemas.microsoft.com/office/powerpoint/2010/main" val="1063692917"/>
+        <p14:creationId xmlns:p14="http://schemas.microsoft.com/office/powerpoint/2010/main" val="599786032"/>
       </p:ext>
     </p:extLst>
   </p:cSld>
@@ -11837,7 +11845,7 @@
           <p:cNvPr id="23" name="">
             <a:extLst xmlns:a="http://schemas.openxmlformats.org/drawingml/2006/main">
               <a:ext uri="{FF2B5EF4-FFF2-40B4-BE49-F238E27FC236}">
-                <a16:creationId xmlns:a16="http://schemas.microsoft.com/office/drawing/2014/main" id="{FDEDFD87-7A3A-4208-A8BB-8A659A84815A}"/>
+                <a16:creationId xmlns:a16="http://schemas.microsoft.com/office/drawing/2014/main" id="{A7AF46BB-6C3C-4698-AD8D-4CBB74E5108C}"/>
               </a:ext>
             </a:extLst>
           </p:cNvPr>
@@ -11869,7 +11877,7 @@
           <p:cNvPr id="2" name="">
             <a:extLst xmlns:a="http://schemas.openxmlformats.org/drawingml/2006/main">
               <a:ext uri="{FF2B5EF4-FFF2-40B4-BE49-F238E27FC236}">
-                <a16:creationId xmlns:a16="http://schemas.microsoft.com/office/drawing/2014/main" id="{696A6334-2B43-4465-9C9E-0726FDDBF2FF}"/>
+                <a16:creationId xmlns:a16="http://schemas.microsoft.com/office/drawing/2014/main" id="{0D9BB4C9-A648-47FE-BFE2-E4EC005C978C}"/>
               </a:ext>
             </a:extLst>
           </p:cNvPr>
@@ -11926,7 +11934,7 @@
           <p:cNvPr id="3" name="">
             <a:extLst xmlns:a="http://schemas.openxmlformats.org/drawingml/2006/main">
               <a:ext uri="{FF2B5EF4-FFF2-40B4-BE49-F238E27FC236}">
-                <a16:creationId xmlns:a16="http://schemas.microsoft.com/office/drawing/2014/main" id="{7D88CFD4-58FD-495E-A1BD-A6E6DF2BEAFA}"/>
+                <a16:creationId xmlns:a16="http://schemas.microsoft.com/office/drawing/2014/main" id="{60B3FD9F-35ED-4889-A695-EFF862F61259}"/>
               </a:ext>
             </a:extLst>
           </p:cNvPr>
@@ -11958,7 +11966,7 @@
           <p:cNvPr id="4" name="">
             <a:extLst xmlns:a="http://schemas.openxmlformats.org/drawingml/2006/main">
               <a:ext uri="{FF2B5EF4-FFF2-40B4-BE49-F238E27FC236}">
-                <a16:creationId xmlns:a16="http://schemas.microsoft.com/office/drawing/2014/main" id="{16572F4F-D7B9-484D-B43D-1A863269F90F}"/>
+                <a16:creationId xmlns:a16="http://schemas.microsoft.com/office/drawing/2014/main" id="{17E81B7A-3A33-4B3C-AFC9-D46C34AC7F53}"/>
               </a:ext>
             </a:extLst>
           </p:cNvPr>
@@ -12015,7 +12023,7 @@
           <p:cNvPr id="5" name="">
             <a:extLst xmlns:a="http://schemas.openxmlformats.org/drawingml/2006/main">
               <a:ext uri="{FF2B5EF4-FFF2-40B4-BE49-F238E27FC236}">
-                <a16:creationId xmlns:a16="http://schemas.microsoft.com/office/drawing/2014/main" id="{54AB552C-7A71-45A7-A9A4-E5DB2AAEC5DD}"/>
+                <a16:creationId xmlns:a16="http://schemas.microsoft.com/office/drawing/2014/main" id="{96AF1D24-1D25-4CBF-AADC-60AB32BE2978}"/>
               </a:ext>
             </a:extLst>
           </p:cNvPr>
@@ -12072,7 +12080,7 @@
           <p:cNvPr id="6" name="">
             <a:extLst xmlns:a="http://schemas.openxmlformats.org/drawingml/2006/main">
               <a:ext uri="{FF2B5EF4-FFF2-40B4-BE49-F238E27FC236}">
-                <a16:creationId xmlns:a16="http://schemas.microsoft.com/office/drawing/2014/main" id="{A43E12B8-2D34-497E-92E1-FB2C1D176875}"/>
+                <a16:creationId xmlns:a16="http://schemas.microsoft.com/office/drawing/2014/main" id="{F29E37E5-1D59-4402-9054-5885A46DEEC9}"/>
               </a:ext>
             </a:extLst>
           </p:cNvPr>
@@ -12129,7 +12137,7 @@
           <p:cNvPr id="7" name="">
             <a:extLst xmlns:a="http://schemas.openxmlformats.org/drawingml/2006/main">
               <a:ext uri="{FF2B5EF4-FFF2-40B4-BE49-F238E27FC236}">
-                <a16:creationId xmlns:a16="http://schemas.microsoft.com/office/drawing/2014/main" id="{C0A98F49-F0F3-4AE1-8F19-C30FC107AF6C}"/>
+                <a16:creationId xmlns:a16="http://schemas.microsoft.com/office/drawing/2014/main" id="{772E27BE-63E5-46E4-8811-0675B847AB98}"/>
               </a:ext>
             </a:extLst>
           </p:cNvPr>
@@ -12161,7 +12169,7 @@
           <p:cNvPr id="8" name="">
             <a:extLst xmlns:a="http://schemas.openxmlformats.org/drawingml/2006/main">
               <a:ext uri="{FF2B5EF4-FFF2-40B4-BE49-F238E27FC236}">
-                <a16:creationId xmlns:a16="http://schemas.microsoft.com/office/drawing/2014/main" id="{007BE27D-4C11-43E4-BB85-710BAA3FF700}"/>
+                <a16:creationId xmlns:a16="http://schemas.microsoft.com/office/drawing/2014/main" id="{154516B5-0982-4F11-AD6C-183E394AB2C1}"/>
               </a:ext>
             </a:extLst>
           </p:cNvPr>
@@ -12218,7 +12226,7 @@
           <p:cNvPr id="9" name="">
             <a:extLst xmlns:a="http://schemas.openxmlformats.org/drawingml/2006/main">
               <a:ext uri="{FF2B5EF4-FFF2-40B4-BE49-F238E27FC236}">
-                <a16:creationId xmlns:a16="http://schemas.microsoft.com/office/drawing/2014/main" id="{454569B2-45D2-488E-BAAA-0A1FAE3C01C5}"/>
+                <a16:creationId xmlns:a16="http://schemas.microsoft.com/office/drawing/2014/main" id="{436B1384-43C4-490E-BC4C-672B9F428879}"/>
               </a:ext>
             </a:extLst>
           </p:cNvPr>
@@ -12275,7 +12283,7 @@
           <p:cNvPr id="10" name="">
             <a:extLst xmlns:a="http://schemas.openxmlformats.org/drawingml/2006/main">
               <a:ext uri="{FF2B5EF4-FFF2-40B4-BE49-F238E27FC236}">
-                <a16:creationId xmlns:a16="http://schemas.microsoft.com/office/drawing/2014/main" id="{900F8E2E-AC43-4922-A6DC-F82B4275C927}"/>
+                <a16:creationId xmlns:a16="http://schemas.microsoft.com/office/drawing/2014/main" id="{B3A09203-C4BC-45FB-9685-D4693E4B4E58}"/>
               </a:ext>
             </a:extLst>
           </p:cNvPr>
@@ -12309,7 +12317,7 @@
           <p:cNvPr id="11" name="">
             <a:extLst xmlns:a="http://schemas.openxmlformats.org/drawingml/2006/main">
               <a:ext uri="{FF2B5EF4-FFF2-40B4-BE49-F238E27FC236}">
-                <a16:creationId xmlns:a16="http://schemas.microsoft.com/office/drawing/2014/main" id="{75AF14C7-14A1-47CD-A212-A98AF5FEB5F7}"/>
+                <a16:creationId xmlns:a16="http://schemas.microsoft.com/office/drawing/2014/main" id="{C9DAB06B-6C1D-4A26-82FD-6941415B03D9}"/>
               </a:ext>
             </a:extLst>
           </p:cNvPr>
@@ -12341,7 +12349,7 @@
           <p:cNvPr id="12" name="">
             <a:extLst xmlns:a="http://schemas.openxmlformats.org/drawingml/2006/main">
               <a:ext uri="{FF2B5EF4-FFF2-40B4-BE49-F238E27FC236}">
-                <a16:creationId xmlns:a16="http://schemas.microsoft.com/office/drawing/2014/main" id="{0A4EB335-6945-4AC4-B056-36E288D931D1}"/>
+                <a16:creationId xmlns:a16="http://schemas.microsoft.com/office/drawing/2014/main" id="{9B5B50DE-5411-484A-8CA4-CAC5CDE494E7}"/>
               </a:ext>
             </a:extLst>
           </p:cNvPr>
@@ -12398,7 +12406,7 @@
           <p:cNvPr id="13" name="">
             <a:extLst xmlns:a="http://schemas.openxmlformats.org/drawingml/2006/main">
               <a:ext uri="{FF2B5EF4-FFF2-40B4-BE49-F238E27FC236}">
-                <a16:creationId xmlns:a16="http://schemas.microsoft.com/office/drawing/2014/main" id="{7D14B10B-E249-4E5A-980B-22F5121B01AE}"/>
+                <a16:creationId xmlns:a16="http://schemas.microsoft.com/office/drawing/2014/main" id="{E5FD9F61-7421-46DC-8323-7F2A5A599E44}"/>
               </a:ext>
             </a:extLst>
           </p:cNvPr>
@@ -12455,7 +12463,7 @@
           <p:cNvPr id="14" name="">
             <a:extLst xmlns:a="http://schemas.openxmlformats.org/drawingml/2006/main">
               <a:ext uri="{FF2B5EF4-FFF2-40B4-BE49-F238E27FC236}">
-                <a16:creationId xmlns:a16="http://schemas.microsoft.com/office/drawing/2014/main" id="{5BB8CA5F-11ED-4FEE-BD8E-EA1B53332FF7}"/>
+                <a16:creationId xmlns:a16="http://schemas.microsoft.com/office/drawing/2014/main" id="{29A68B0C-13D5-42D4-9CC7-C903EDDD9F51}"/>
               </a:ext>
             </a:extLst>
           </p:cNvPr>
@@ -12489,7 +12497,7 @@
           <p:cNvPr id="15" name="">
             <a:extLst xmlns:a="http://schemas.openxmlformats.org/drawingml/2006/main">
               <a:ext uri="{FF2B5EF4-FFF2-40B4-BE49-F238E27FC236}">
-                <a16:creationId xmlns:a16="http://schemas.microsoft.com/office/drawing/2014/main" id="{0C55660A-A200-4806-BF79-3B2B5659DF0D}"/>
+                <a16:creationId xmlns:a16="http://schemas.microsoft.com/office/drawing/2014/main" id="{9FAD7B88-85AA-4B94-A159-E7AB9160871F}"/>
               </a:ext>
             </a:extLst>
           </p:cNvPr>
@@ -12521,7 +12529,7 @@
           <p:cNvPr id="16" name="">
             <a:extLst xmlns:a="http://schemas.openxmlformats.org/drawingml/2006/main">
               <a:ext uri="{FF2B5EF4-FFF2-40B4-BE49-F238E27FC236}">
-                <a16:creationId xmlns:a16="http://schemas.microsoft.com/office/drawing/2014/main" id="{3E247EE7-8B58-4107-89E0-CA6329563786}"/>
+                <a16:creationId xmlns:a16="http://schemas.microsoft.com/office/drawing/2014/main" id="{1F5ECBBD-3DC7-464F-A926-01125B8FA311}"/>
               </a:ext>
             </a:extLst>
           </p:cNvPr>
@@ -12578,7 +12586,7 @@
           <p:cNvPr id="17" name="">
             <a:extLst xmlns:a="http://schemas.openxmlformats.org/drawingml/2006/main">
               <a:ext uri="{FF2B5EF4-FFF2-40B4-BE49-F238E27FC236}">
-                <a16:creationId xmlns:a16="http://schemas.microsoft.com/office/drawing/2014/main" id="{CB243E97-C65C-4D82-A622-E2162C181FB0}"/>
+                <a16:creationId xmlns:a16="http://schemas.microsoft.com/office/drawing/2014/main" id="{4BAC36F1-727C-4511-BC7F-0CA9537126E7}"/>
               </a:ext>
             </a:extLst>
           </p:cNvPr>
@@ -12635,7 +12643,7 @@
           <p:cNvPr id="18" name="">
             <a:extLst xmlns:a="http://schemas.openxmlformats.org/drawingml/2006/main">
               <a:ext uri="{FF2B5EF4-FFF2-40B4-BE49-F238E27FC236}">
-                <a16:creationId xmlns:a16="http://schemas.microsoft.com/office/drawing/2014/main" id="{C1710E69-622B-4390-BA34-D6810F3DD459}"/>
+                <a16:creationId xmlns:a16="http://schemas.microsoft.com/office/drawing/2014/main" id="{D424E5E2-DC23-419B-ACF4-00B721E06E2E}"/>
               </a:ext>
             </a:extLst>
           </p:cNvPr>
@@ -12669,7 +12677,7 @@
           <p:cNvPr id="19" name="">
             <a:extLst xmlns:a="http://schemas.openxmlformats.org/drawingml/2006/main">
               <a:ext uri="{FF2B5EF4-FFF2-40B4-BE49-F238E27FC236}">
-                <a16:creationId xmlns:a16="http://schemas.microsoft.com/office/drawing/2014/main" id="{DB4BBAB8-D208-4942-869D-09306104DE80}"/>
+                <a16:creationId xmlns:a16="http://schemas.microsoft.com/office/drawing/2014/main" id="{634B137E-3619-4548-A1D5-EFD69F19287C}"/>
               </a:ext>
             </a:extLst>
           </p:cNvPr>
@@ -12701,7 +12709,7 @@
           <p:cNvPr id="20" name="">
             <a:extLst xmlns:a="http://schemas.openxmlformats.org/drawingml/2006/main">
               <a:ext uri="{FF2B5EF4-FFF2-40B4-BE49-F238E27FC236}">
-                <a16:creationId xmlns:a16="http://schemas.microsoft.com/office/drawing/2014/main" id="{CAC67469-760A-45EF-8626-C6B2A224DBD3}"/>
+                <a16:creationId xmlns:a16="http://schemas.microsoft.com/office/drawing/2014/main" id="{239FEB66-08BB-466D-8899-038F5FE6BE4C}"/>
               </a:ext>
             </a:extLst>
           </p:cNvPr>
@@ -12758,7 +12766,7 @@
           <p:cNvPr id="21" name="">
             <a:extLst xmlns:a="http://schemas.openxmlformats.org/drawingml/2006/main">
               <a:ext uri="{FF2B5EF4-FFF2-40B4-BE49-F238E27FC236}">
-                <a16:creationId xmlns:a16="http://schemas.microsoft.com/office/drawing/2014/main" id="{DFA0C735-EBE6-441A-995F-B0A5DD90536F}"/>
+                <a16:creationId xmlns:a16="http://schemas.microsoft.com/office/drawing/2014/main" id="{62C65E4D-7DDE-44A1-AC54-AB080752AE66}"/>
               </a:ext>
             </a:extLst>
           </p:cNvPr>
@@ -12815,7 +12823,7 @@
           <p:cNvPr id="22" name="">
             <a:extLst xmlns:a="http://schemas.openxmlformats.org/drawingml/2006/main">
               <a:ext uri="{FF2B5EF4-FFF2-40B4-BE49-F238E27FC236}">
-                <a16:creationId xmlns:a16="http://schemas.microsoft.com/office/drawing/2014/main" id="{A707FB66-ACB0-486E-A6D5-632CA1EDE19C}"/>
+                <a16:creationId xmlns:a16="http://schemas.microsoft.com/office/drawing/2014/main" id="{9CEB10D8-69FA-4B8F-AB8D-72F7A823BEA8}"/>
               </a:ext>
             </a:extLst>
           </p:cNvPr>
@@ -12870,7 +12878,7 @@
     </p:spTree>
     <p:extLst>
       <p:ext uri="{BB962C8B-B14F-4D97-AF65-F5344CB8AC3E}">
-        <p14:creationId xmlns:p14="http://schemas.microsoft.com/office/powerpoint/2010/main" val="228324943"/>
+        <p14:creationId xmlns:p14="http://schemas.microsoft.com/office/powerpoint/2010/main" val="1252461402"/>
       </p:ext>
     </p:extLst>
   </p:cSld>
@@ -13071,7 +13079,7 @@
           <p:cNvPr id="22" name="">
             <a:extLst xmlns:a="http://schemas.openxmlformats.org/drawingml/2006/main">
               <a:ext uri="{FF2B5EF4-FFF2-40B4-BE49-F238E27FC236}">
-                <a16:creationId xmlns:a16="http://schemas.microsoft.com/office/drawing/2014/main" id="{C5950911-AEDC-40ED-A802-5D3A6FA4CED6}"/>
+                <a16:creationId xmlns:a16="http://schemas.microsoft.com/office/drawing/2014/main" id="{AF83DED6-9F08-45A9-9A14-5332C099C5FD}"/>
               </a:ext>
             </a:extLst>
           </p:cNvPr>
@@ -13103,7 +13111,7 @@
           <p:cNvPr id="2" name="">
             <a:extLst xmlns:a="http://schemas.openxmlformats.org/drawingml/2006/main">
               <a:ext uri="{FF2B5EF4-FFF2-40B4-BE49-F238E27FC236}">
-                <a16:creationId xmlns:a16="http://schemas.microsoft.com/office/drawing/2014/main" id="{1EE5A41A-B241-4BE3-8F61-BF632470FB31}"/>
+                <a16:creationId xmlns:a16="http://schemas.microsoft.com/office/drawing/2014/main" id="{5C1851BB-1ECC-4BC4-8163-D4CCD570909F}"/>
               </a:ext>
             </a:extLst>
           </p:cNvPr>
@@ -13160,7 +13168,7 @@
           <p:cNvPr id="3" name="">
             <a:extLst xmlns:a="http://schemas.openxmlformats.org/drawingml/2006/main">
               <a:ext uri="{FF2B5EF4-FFF2-40B4-BE49-F238E27FC236}">
-                <a16:creationId xmlns:a16="http://schemas.microsoft.com/office/drawing/2014/main" id="{516C7014-5D09-4841-AA0E-37CE5AB4FFFF}"/>
+                <a16:creationId xmlns:a16="http://schemas.microsoft.com/office/drawing/2014/main" id="{9B2C00A7-F685-4CC8-9C3A-9DCBE9F04AB9}"/>
               </a:ext>
             </a:extLst>
           </p:cNvPr>
@@ -13192,7 +13200,7 @@
           <p:cNvPr id="4" name="">
             <a:extLst xmlns:a="http://schemas.openxmlformats.org/drawingml/2006/main">
               <a:ext uri="{FF2B5EF4-FFF2-40B4-BE49-F238E27FC236}">
-                <a16:creationId xmlns:a16="http://schemas.microsoft.com/office/drawing/2014/main" id="{7FC8DF28-ED99-4441-AD1E-875A87B70784}"/>
+                <a16:creationId xmlns:a16="http://schemas.microsoft.com/office/drawing/2014/main" id="{89F18221-43BC-412C-A6A3-B02C662CC088}"/>
               </a:ext>
             </a:extLst>
           </p:cNvPr>
@@ -13249,7 +13257,7 @@
           <p:cNvPr id="5" name="">
             <a:extLst xmlns:a="http://schemas.openxmlformats.org/drawingml/2006/main">
               <a:ext uri="{FF2B5EF4-FFF2-40B4-BE49-F238E27FC236}">
-                <a16:creationId xmlns:a16="http://schemas.microsoft.com/office/drawing/2014/main" id="{DB6ADCB9-3CB4-42C6-AA30-FDC2160EEF63}"/>
+                <a16:creationId xmlns:a16="http://schemas.microsoft.com/office/drawing/2014/main" id="{C512851F-E3C7-4CD0-B30A-D47313BCD334}"/>
               </a:ext>
             </a:extLst>
           </p:cNvPr>
@@ -13306,7 +13314,7 @@
           <p:cNvPr id="6" name="">
             <a:extLst xmlns:a="http://schemas.openxmlformats.org/drawingml/2006/main">
               <a:ext uri="{FF2B5EF4-FFF2-40B4-BE49-F238E27FC236}">
-                <a16:creationId xmlns:a16="http://schemas.microsoft.com/office/drawing/2014/main" id="{F2016066-8327-461F-94F4-F4C97DC76D21}"/>
+                <a16:creationId xmlns:a16="http://schemas.microsoft.com/office/drawing/2014/main" id="{9338AED4-0A4C-426A-A788-808F7105C497}"/>
               </a:ext>
             </a:extLst>
           </p:cNvPr>
@@ -13363,7 +13371,7 @@
           <p:cNvPr id="7" name="">
             <a:extLst xmlns:a="http://schemas.openxmlformats.org/drawingml/2006/main">
               <a:ext uri="{FF2B5EF4-FFF2-40B4-BE49-F238E27FC236}">
-                <a16:creationId xmlns:a16="http://schemas.microsoft.com/office/drawing/2014/main" id="{2D122A18-40B3-413A-9DE6-1623F6AA0FB7}"/>
+                <a16:creationId xmlns:a16="http://schemas.microsoft.com/office/drawing/2014/main" id="{7A4CE0F3-EFAD-49D6-9DBA-4604C8764C6F}"/>
               </a:ext>
             </a:extLst>
           </p:cNvPr>
@@ -13395,7 +13403,7 @@
           <p:cNvPr id="8" name="">
             <a:extLst xmlns:a="http://schemas.openxmlformats.org/drawingml/2006/main">
               <a:ext uri="{FF2B5EF4-FFF2-40B4-BE49-F238E27FC236}">
-                <a16:creationId xmlns:a16="http://schemas.microsoft.com/office/drawing/2014/main" id="{EA3D826E-10DD-4466-8406-7347FE4D795D}"/>
+                <a16:creationId xmlns:a16="http://schemas.microsoft.com/office/drawing/2014/main" id="{93AF0847-8BB8-4962-972C-032CE00D19E4}"/>
               </a:ext>
             </a:extLst>
           </p:cNvPr>
@@ -13452,7 +13460,7 @@
           <p:cNvPr id="9" name="">
             <a:extLst xmlns:a="http://schemas.openxmlformats.org/drawingml/2006/main">
               <a:ext uri="{FF2B5EF4-FFF2-40B4-BE49-F238E27FC236}">
-                <a16:creationId xmlns:a16="http://schemas.microsoft.com/office/drawing/2014/main" id="{3FEC10F3-30CD-435D-8FE1-971CD843DDA9}"/>
+                <a16:creationId xmlns:a16="http://schemas.microsoft.com/office/drawing/2014/main" id="{070E5402-694A-44C6-8901-0D5B4E23AE3F}"/>
               </a:ext>
             </a:extLst>
           </p:cNvPr>
@@ -13509,7 +13517,7 @@
           <p:cNvPr id="10" name="">
             <a:extLst xmlns:a="http://schemas.openxmlformats.org/drawingml/2006/main">
               <a:ext uri="{FF2B5EF4-FFF2-40B4-BE49-F238E27FC236}">
-                <a16:creationId xmlns:a16="http://schemas.microsoft.com/office/drawing/2014/main" id="{9FC7CEC7-C8EC-45F1-AA1A-D6BED548F165}"/>
+                <a16:creationId xmlns:a16="http://schemas.microsoft.com/office/drawing/2014/main" id="{0662F789-164E-458A-A0AD-25E592582309}"/>
               </a:ext>
             </a:extLst>
           </p:cNvPr>
@@ -13543,7 +13551,7 @@
           <p:cNvPr id="11" name="">
             <a:extLst xmlns:a="http://schemas.openxmlformats.org/drawingml/2006/main">
               <a:ext uri="{FF2B5EF4-FFF2-40B4-BE49-F238E27FC236}">
-                <a16:creationId xmlns:a16="http://schemas.microsoft.com/office/drawing/2014/main" id="{6C01783C-8B6F-496A-8793-3871067B2E9A}"/>
+                <a16:creationId xmlns:a16="http://schemas.microsoft.com/office/drawing/2014/main" id="{0BDE14D7-207A-402F-9AC4-21F6E9746721}"/>
               </a:ext>
             </a:extLst>
           </p:cNvPr>
@@ -13575,7 +13583,7 @@
           <p:cNvPr id="12" name="">
             <a:extLst xmlns:a="http://schemas.openxmlformats.org/drawingml/2006/main">
               <a:ext uri="{FF2B5EF4-FFF2-40B4-BE49-F238E27FC236}">
-                <a16:creationId xmlns:a16="http://schemas.microsoft.com/office/drawing/2014/main" id="{6C0B70DE-ABA3-4643-B5B3-96535A098671}"/>
+                <a16:creationId xmlns:a16="http://schemas.microsoft.com/office/drawing/2014/main" id="{3CD8303E-80AF-49BC-9590-5089923A7411}"/>
               </a:ext>
             </a:extLst>
           </p:cNvPr>
@@ -13632,7 +13640,7 @@
           <p:cNvPr id="13" name="">
             <a:extLst xmlns:a="http://schemas.openxmlformats.org/drawingml/2006/main">
               <a:ext uri="{FF2B5EF4-FFF2-40B4-BE49-F238E27FC236}">
-                <a16:creationId xmlns:a16="http://schemas.microsoft.com/office/drawing/2014/main" id="{40E60314-8749-434E-90CC-8B65DD684985}"/>
+                <a16:creationId xmlns:a16="http://schemas.microsoft.com/office/drawing/2014/main" id="{DF2C829B-C712-430F-9EFF-8ABF578AD3CD}"/>
               </a:ext>
             </a:extLst>
           </p:cNvPr>
@@ -13689,7 +13697,7 @@
           <p:cNvPr id="14" name="">
             <a:extLst xmlns:a="http://schemas.openxmlformats.org/drawingml/2006/main">
               <a:ext uri="{FF2B5EF4-FFF2-40B4-BE49-F238E27FC236}">
-                <a16:creationId xmlns:a16="http://schemas.microsoft.com/office/drawing/2014/main" id="{EAED0C62-A805-490C-912F-E0B997D669AE}"/>
+                <a16:creationId xmlns:a16="http://schemas.microsoft.com/office/drawing/2014/main" id="{D24B9434-B2EE-402A-A815-B3F9E20422D6}"/>
               </a:ext>
             </a:extLst>
           </p:cNvPr>
@@ -13723,7 +13731,7 @@
           <p:cNvPr id="15" name="">
             <a:extLst xmlns:a="http://schemas.openxmlformats.org/drawingml/2006/main">
               <a:ext uri="{FF2B5EF4-FFF2-40B4-BE49-F238E27FC236}">
-                <a16:creationId xmlns:a16="http://schemas.microsoft.com/office/drawing/2014/main" id="{293231A5-C28D-4476-968A-DFDBD28D76C5}"/>
+                <a16:creationId xmlns:a16="http://schemas.microsoft.com/office/drawing/2014/main" id="{355CA5E7-36BF-4DC0-87F5-541367EB94B0}"/>
               </a:ext>
             </a:extLst>
           </p:cNvPr>
@@ -13755,7 +13763,7 @@
           <p:cNvPr id="16" name="">
             <a:extLst xmlns:a="http://schemas.openxmlformats.org/drawingml/2006/main">
               <a:ext uri="{FF2B5EF4-FFF2-40B4-BE49-F238E27FC236}">
-                <a16:creationId xmlns:a16="http://schemas.microsoft.com/office/drawing/2014/main" id="{3002F2EC-8BA6-4728-9895-21D9787AABEB}"/>
+                <a16:creationId xmlns:a16="http://schemas.microsoft.com/office/drawing/2014/main" id="{5C7C5A2F-8BE0-4797-BD7B-67F6116CFF36}"/>
               </a:ext>
             </a:extLst>
           </p:cNvPr>
@@ -13812,7 +13820,7 @@
           <p:cNvPr id="17" name="">
             <a:extLst xmlns:a="http://schemas.openxmlformats.org/drawingml/2006/main">
               <a:ext uri="{FF2B5EF4-FFF2-40B4-BE49-F238E27FC236}">
-                <a16:creationId xmlns:a16="http://schemas.microsoft.com/office/drawing/2014/main" id="{77C4D41F-88A3-4040-A40B-2D2B1DECE705}"/>
+                <a16:creationId xmlns:a16="http://schemas.microsoft.com/office/drawing/2014/main" id="{95B5DE6D-EDE5-4106-8E93-694F6F5849A1}"/>
               </a:ext>
             </a:extLst>
           </p:cNvPr>
@@ -13869,7 +13877,7 @@
           <p:cNvPr id="18" name="">
             <a:extLst xmlns:a="http://schemas.openxmlformats.org/drawingml/2006/main">
               <a:ext uri="{FF2B5EF4-FFF2-40B4-BE49-F238E27FC236}">
-                <a16:creationId xmlns:a16="http://schemas.microsoft.com/office/drawing/2014/main" id="{231F5980-99E3-471F-8BB9-DDFC6F13EFFD}"/>
+                <a16:creationId xmlns:a16="http://schemas.microsoft.com/office/drawing/2014/main" id="{0B3AB92E-70A7-481F-AEE5-E83241218217}"/>
               </a:ext>
             </a:extLst>
           </p:cNvPr>
@@ -13903,7 +13911,7 @@
           <p:cNvPr id="19" name="">
             <a:extLst xmlns:a="http://schemas.openxmlformats.org/drawingml/2006/main">
               <a:ext uri="{FF2B5EF4-FFF2-40B4-BE49-F238E27FC236}">
-                <a16:creationId xmlns:a16="http://schemas.microsoft.com/office/drawing/2014/main" id="{7F8F98AA-2DD0-4FF4-A6E9-9BFA3095DDEE}"/>
+                <a16:creationId xmlns:a16="http://schemas.microsoft.com/office/drawing/2014/main" id="{4DED18BD-57D4-4D89-B872-2D297F690D6C}"/>
               </a:ext>
             </a:extLst>
           </p:cNvPr>
@@ -13935,7 +13943,7 @@
           <p:cNvPr id="20" name="">
             <a:extLst xmlns:a="http://schemas.openxmlformats.org/drawingml/2006/main">
               <a:ext uri="{FF2B5EF4-FFF2-40B4-BE49-F238E27FC236}">
-                <a16:creationId xmlns:a16="http://schemas.microsoft.com/office/drawing/2014/main" id="{D68283FB-2A35-4C91-A120-E268AD1D726F}"/>
+                <a16:creationId xmlns:a16="http://schemas.microsoft.com/office/drawing/2014/main" id="{8230F4B7-9D89-4CB4-B237-5D1E1C3A9477}"/>
               </a:ext>
             </a:extLst>
           </p:cNvPr>
@@ -13992,7 +14000,7 @@
           <p:cNvPr id="21" name="">
             <a:extLst xmlns:a="http://schemas.openxmlformats.org/drawingml/2006/main">
               <a:ext uri="{FF2B5EF4-FFF2-40B4-BE49-F238E27FC236}">
-                <a16:creationId xmlns:a16="http://schemas.microsoft.com/office/drawing/2014/main" id="{16D3BE5C-330E-45F9-B60F-194739F41087}"/>
+                <a16:creationId xmlns:a16="http://schemas.microsoft.com/office/drawing/2014/main" id="{CF23D329-4C71-4D0C-AB61-DC4A3719F60F}"/>
               </a:ext>
             </a:extLst>
           </p:cNvPr>
@@ -14047,7 +14055,7 @@
     </p:spTree>
     <p:extLst>
       <p:ext uri="{BB962C8B-B14F-4D97-AF65-F5344CB8AC3E}">
-        <p14:creationId xmlns:p14="http://schemas.microsoft.com/office/powerpoint/2010/main" val="1203696105"/>
+        <p14:creationId xmlns:p14="http://schemas.microsoft.com/office/powerpoint/2010/main" val="1277267529"/>
       </p:ext>
     </p:extLst>
   </p:cSld>
